--- a/report/slides_ADGR.pptx
+++ b/report/slides_ADGR.pptx
@@ -18,6 +18,11 @@
     <p:sldId id="266" r:id="rId17"/>
     <p:sldId id="267" r:id="rId18"/>
     <p:sldId id="268" r:id="rId19"/>
+    <p:sldId id="269" r:id="rId20"/>
+    <p:sldId id="270" r:id="rId21"/>
+    <p:sldId id="271" r:id="rId22"/>
+    <p:sldId id="272" r:id="rId23"/>
+    <p:sldId id="273" r:id="rId24"/>
   </p:sldIdLst>
   <p:sldSz cx="12188952" cy="6858000" type="screen4x3"/>
   <p:notesSz cx="6858000" cy="9144000"/>
@@ -3096,7 +3101,7 @@
     <p:bg>
       <p:bgPr>
         <a:solidFill>
-          <a:srgbClr val="FFFFFF"/>
+          <a:srgbClr val="1F3864"/>
         </a:solidFill>
         <a:effectLst/>
       </p:bgPr>
@@ -3125,13 +3130,13 @@
           <a:noFill/>
         </p:spPr>
         <p:txBody>
-          <a:bodyPr wrap="none">
+          <a:bodyPr wrap="square">
             <a:spAutoFit/>
           </a:bodyPr>
           <a:lstStyle/>
           <a:p>
             <a:pPr algn="r">
-              <a:defRPr sz="1200">
+              <a:defRPr sz="1200" b="0">
                 <a:solidFill>
                   <a:srgbClr val="595959"/>
                 </a:solidFill>
@@ -3139,7 +3144,7 @@
               </a:defRPr>
             </a:pPr>
             <a:r>
-              <a:t>1/13</a:t>
+              <a:t>1/18</a:t>
             </a:r>
           </a:p>
         </p:txBody>
@@ -3152,30 +3157,30 @@
         </p:nvSpPr>
         <p:spPr>
           <a:xfrm>
-            <a:off x="640080" y="1097280"/>
-            <a:ext cx="10881360" cy="914400"/>
-          </a:xfrm>
-          <a:prstGeom prst="rect">
-            <a:avLst/>
-          </a:prstGeom>
-          <a:noFill/>
-        </p:spPr>
-        <p:txBody>
-          <a:bodyPr wrap="none">
-            <a:spAutoFit/>
-          </a:bodyPr>
-          <a:lstStyle/>
-          <a:p>
-            <a:pPr>
-              <a:defRPr sz="4400" b="1">
-                <a:solidFill>
-                  <a:srgbClr val="1F3864"/>
-                </a:solidFill>
-                <a:latin typeface="Arial"/>
-              </a:defRPr>
-            </a:pPr>
-            <a:r>
-              <a:t>Tái hiện độc lập hệ thống ADGR</a:t>
+            <a:off x="822960" y="914400"/>
+            <a:ext cx="10515600" cy="548640"/>
+          </a:xfrm>
+          <a:prstGeom prst="rect">
+            <a:avLst/>
+          </a:prstGeom>
+          <a:noFill/>
+        </p:spPr>
+        <p:txBody>
+          <a:bodyPr wrap="square">
+            <a:spAutoFit/>
+          </a:bodyPr>
+          <a:lstStyle/>
+          <a:p>
+            <a:pPr>
+              <a:defRPr sz="2000" b="1">
+                <a:solidFill>
+                  <a:srgbClr val="2EB8C8"/>
+                </a:solidFill>
+                <a:latin typeface="Arial"/>
+              </a:defRPr>
+            </a:pPr>
+            <a:r>
+              <a:t>TÁI HIỆN ĐỘC LẬP HỆ THỐNG ADGR</a:t>
             </a:r>
           </a:p>
         </p:txBody>
@@ -3188,30 +3193,34 @@
         </p:nvSpPr>
         <p:spPr>
           <a:xfrm>
-            <a:off x="640080" y="2194560"/>
-            <a:ext cx="10881360" cy="914400"/>
-          </a:xfrm>
-          <a:prstGeom prst="rect">
-            <a:avLst/>
-          </a:prstGeom>
-          <a:noFill/>
-        </p:spPr>
-        <p:txBody>
-          <a:bodyPr wrap="none">
-            <a:spAutoFit/>
-          </a:bodyPr>
-          <a:lstStyle/>
-          <a:p>
-            <a:pPr>
-              <a:defRPr sz="2400" b="1">
-                <a:solidFill>
-                  <a:srgbClr val="2E75B6"/>
-                </a:solidFill>
-                <a:latin typeface="Arial"/>
-              </a:defRPr>
-            </a:pPr>
-            <a:r>
-              <a:t>GraphRAG y khoa tiếng Việt: từ bài báo đến số liệu chạy thật</a:t>
+            <a:off x="822960" y="1554480"/>
+            <a:ext cx="10515600" cy="1463040"/>
+          </a:xfrm>
+          <a:prstGeom prst="rect">
+            <a:avLst/>
+          </a:prstGeom>
+          <a:noFill/>
+        </p:spPr>
+        <p:txBody>
+          <a:bodyPr wrap="square">
+            <a:spAutoFit/>
+          </a:bodyPr>
+          <a:lstStyle/>
+          <a:p>
+            <a:pPr>
+              <a:defRPr sz="4000" b="1">
+                <a:solidFill>
+                  <a:srgbClr val="FFFFFF"/>
+                </a:solidFill>
+                <a:latin typeface="Arial"/>
+              </a:defRPr>
+            </a:pPr>
+            <a:r>
+              <a:t>GraphRAG y khoa tiếng Việt:</a:t>
+            </a:r>
+            <a:br/>
+            <a:r>
+              <a:t>từ bài báo đến số liệu chạy thật</a:t>
             </a:r>
           </a:p>
         </p:txBody>
@@ -3224,24 +3233,24 @@
         </p:nvSpPr>
         <p:spPr>
           <a:xfrm>
-            <a:off x="822960" y="3840480"/>
-            <a:ext cx="10515600" cy="548640"/>
-          </a:xfrm>
-          <a:prstGeom prst="rect">
-            <a:avLst/>
-          </a:prstGeom>
-          <a:noFill/>
-        </p:spPr>
-        <p:txBody>
-          <a:bodyPr wrap="none">
-            <a:spAutoFit/>
-          </a:bodyPr>
-          <a:lstStyle/>
-          <a:p>
-            <a:pPr>
-              <a:defRPr sz="2000">
-                <a:solidFill>
-                  <a:srgbClr val="595959"/>
+            <a:off x="822960" y="3931920"/>
+            <a:ext cx="10515600" cy="640080"/>
+          </a:xfrm>
+          <a:prstGeom prst="rect">
+            <a:avLst/>
+          </a:prstGeom>
+          <a:noFill/>
+        </p:spPr>
+        <p:txBody>
+          <a:bodyPr wrap="square">
+            <a:spAutoFit/>
+          </a:bodyPr>
+          <a:lstStyle/>
+          <a:p>
+            <a:pPr>
+              <a:defRPr sz="2200" b="0">
+                <a:solidFill>
+                  <a:srgbClr val="FFFFFF"/>
                 </a:solidFill>
                 <a:latin typeface="Arial"/>
               </a:defRPr>
@@ -3260,24 +3269,24 @@
         </p:nvSpPr>
         <p:spPr>
           <a:xfrm>
-            <a:off x="822960" y="4343400"/>
-            <a:ext cx="10515600" cy="548640"/>
-          </a:xfrm>
-          <a:prstGeom prst="rect">
-            <a:avLst/>
-          </a:prstGeom>
-          <a:noFill/>
-        </p:spPr>
-        <p:txBody>
-          <a:bodyPr wrap="none">
-            <a:spAutoFit/>
-          </a:bodyPr>
-          <a:lstStyle/>
-          <a:p>
-            <a:pPr>
-              <a:defRPr sz="2000">
-                <a:solidFill>
-                  <a:srgbClr val="595959"/>
+            <a:off x="822960" y="4846320"/>
+            <a:ext cx="10515600" cy="640080"/>
+          </a:xfrm>
+          <a:prstGeom prst="rect">
+            <a:avLst/>
+          </a:prstGeom>
+          <a:noFill/>
+        </p:spPr>
+        <p:txBody>
+          <a:bodyPr wrap="square">
+            <a:spAutoFit/>
+          </a:bodyPr>
+          <a:lstStyle/>
+          <a:p>
+            <a:pPr>
+              <a:defRPr sz="1800" b="0">
+                <a:solidFill>
+                  <a:srgbClr val="2EB8C8"/>
                 </a:solidFill>
                 <a:latin typeface="Arial"/>
               </a:defRPr>
@@ -3331,13 +3340,13 @@
           <a:noFill/>
         </p:spPr>
         <p:txBody>
-          <a:bodyPr wrap="none">
+          <a:bodyPr wrap="square">
             <a:spAutoFit/>
           </a:bodyPr>
           <a:lstStyle/>
           <a:p>
             <a:pPr algn="r">
-              <a:defRPr sz="1200">
+              <a:defRPr sz="1200" b="0">
                 <a:solidFill>
                   <a:srgbClr val="595959"/>
                 </a:solidFill>
@@ -3345,7 +3354,7 @@
               </a:defRPr>
             </a:pPr>
             <a:r>
-              <a:t>10/13</a:t>
+              <a:t>10/18</a:t>
             </a:r>
           </a:p>
         </p:txBody>
@@ -3358,22 +3367,58 @@
         </p:nvSpPr>
         <p:spPr>
           <a:xfrm>
-            <a:off x="640080" y="274320"/>
-            <a:ext cx="10881360" cy="914400"/>
-          </a:xfrm>
-          <a:prstGeom prst="rect">
-            <a:avLst/>
-          </a:prstGeom>
-          <a:noFill/>
-        </p:spPr>
-        <p:txBody>
-          <a:bodyPr wrap="none">
-            <a:spAutoFit/>
-          </a:bodyPr>
-          <a:lstStyle/>
-          <a:p>
-            <a:pPr>
-              <a:defRPr sz="3600" b="1">
+            <a:off x="640080" y="320040"/>
+            <a:ext cx="10881360" cy="457200"/>
+          </a:xfrm>
+          <a:prstGeom prst="rect">
+            <a:avLst/>
+          </a:prstGeom>
+          <a:noFill/>
+        </p:spPr>
+        <p:txBody>
+          <a:bodyPr wrap="square">
+            <a:spAutoFit/>
+          </a:bodyPr>
+          <a:lstStyle/>
+          <a:p>
+            <a:pPr>
+              <a:defRPr sz="1400" b="1">
+                <a:solidFill>
+                  <a:srgbClr val="2EB8C8"/>
+                </a:solidFill>
+                <a:latin typeface="Arial"/>
+              </a:defRPr>
+            </a:pPr>
+            <a:r>
+              <a:t>BẢNG 5 — XẾP HẠNG</a:t>
+            </a:r>
+          </a:p>
+        </p:txBody>
+      </p:sp>
+      <p:sp>
+        <p:nvSpPr>
+          <p:cNvPr id="4" name="TextBox 3"/>
+          <p:cNvSpPr txBox="1"/>
+          <p:nvPr/>
+        </p:nvSpPr>
+        <p:spPr>
+          <a:xfrm>
+            <a:off x="640080" y="685800"/>
+            <a:ext cx="10881360" cy="822960"/>
+          </a:xfrm>
+          <a:prstGeom prst="rect">
+            <a:avLst/>
+          </a:prstGeom>
+          <a:noFill/>
+        </p:spPr>
+        <p:txBody>
+          <a:bodyPr wrap="square">
+            <a:spAutoFit/>
+          </a:bodyPr>
+          <a:lstStyle/>
+          <a:p>
+            <a:pPr>
+              <a:defRPr sz="3000" b="1">
                 <a:solidFill>
                   <a:srgbClr val="1F3864"/>
                 </a:solidFill>
@@ -3381,115 +3426,67 @@
               </a:defRPr>
             </a:pPr>
             <a:r>
-              <a:t>Kết luận từng chỉ số</a:t>
-            </a:r>
-          </a:p>
-        </p:txBody>
-      </p:sp>
-      <p:sp>
-        <p:nvSpPr>
-          <p:cNvPr id="4" name="TextBox 3"/>
-          <p:cNvSpPr txBox="1"/>
-          <p:nvPr/>
-        </p:nvSpPr>
-        <p:spPr>
-          <a:xfrm>
-            <a:off x="1097280" y="2011680"/>
-            <a:ext cx="3291840" cy="1097280"/>
-          </a:xfrm>
-          <a:prstGeom prst="rect">
-            <a:avLst/>
-          </a:prstGeom>
-          <a:noFill/>
-        </p:spPr>
-        <p:txBody>
-          <a:bodyPr wrap="none">
+              <a:t>Cao nhất và ổn định, giữ hạng cả 2 prompt</a:t>
+            </a:r>
+          </a:p>
+        </p:txBody>
+      </p:sp>
+      <p:pic>
+        <p:nvPicPr>
+          <p:cNvPr id="5" name="Picture 4" descr="fig_tab5.png"/>
+          <p:cNvPicPr>
+            <a:picLocks noChangeAspect="1"/>
+          </p:cNvPicPr>
+          <p:nvPr/>
+        </p:nvPicPr>
+        <p:blipFill>
+          <a:blip r:embed="rId2"/>
+          <a:stretch>
+            <a:fillRect/>
+          </a:stretch>
+        </p:blipFill>
+        <p:spPr>
+          <a:xfrm>
+            <a:off x="640080" y="1737360"/>
+            <a:ext cx="6766560" cy="3044952"/>
+          </a:xfrm>
+          <a:prstGeom prst="rect">
+            <a:avLst/>
+          </a:prstGeom>
+        </p:spPr>
+      </p:pic>
+      <p:sp>
+        <p:nvSpPr>
+          <p:cNvPr id="6" name="TextBox 5"/>
+          <p:cNvSpPr txBox="1"/>
+          <p:nvPr/>
+        </p:nvSpPr>
+        <p:spPr>
+          <a:xfrm>
+            <a:off x="7772400" y="1828800"/>
+            <a:ext cx="3474720" cy="1188720"/>
+          </a:xfrm>
+          <a:prstGeom prst="rect">
+            <a:avLst/>
+          </a:prstGeom>
+          <a:noFill/>
+        </p:spPr>
+        <p:txBody>
+          <a:bodyPr wrap="square">
             <a:spAutoFit/>
           </a:bodyPr>
           <a:lstStyle/>
           <a:p>
             <a:pPr algn="ctr">
-              <a:defRPr sz="9000" b="1">
-                <a:solidFill>
-                  <a:srgbClr val="2E75B6"/>
-                </a:solidFill>
-                <a:latin typeface="Arial"/>
-              </a:defRPr>
-            </a:pPr>
-            <a:r>
-              <a:t>9</a:t>
-            </a:r>
-          </a:p>
-        </p:txBody>
-      </p:sp>
-      <p:sp>
-        <p:nvSpPr>
-          <p:cNvPr id="5" name="TextBox 4"/>
-          <p:cNvSpPr txBox="1"/>
-          <p:nvPr/>
-        </p:nvSpPr>
-        <p:spPr>
-          <a:xfrm>
-            <a:off x="4754880" y="2011680"/>
-            <a:ext cx="3291840" cy="1097280"/>
-          </a:xfrm>
-          <a:prstGeom prst="rect">
-            <a:avLst/>
-          </a:prstGeom>
-          <a:noFill/>
-        </p:spPr>
-        <p:txBody>
-          <a:bodyPr wrap="none">
-            <a:spAutoFit/>
-          </a:bodyPr>
-          <a:lstStyle/>
-          <a:p>
-            <a:pPr algn="ctr">
-              <a:defRPr sz="9000" b="1">
-                <a:solidFill>
-                  <a:srgbClr val="2E75B6"/>
-                </a:solidFill>
-                <a:latin typeface="Arial"/>
-              </a:defRPr>
-            </a:pPr>
-            <a:r>
-              <a:t>5</a:t>
-            </a:r>
-          </a:p>
-        </p:txBody>
-      </p:sp>
-      <p:sp>
-        <p:nvSpPr>
-          <p:cNvPr id="6" name="TextBox 5"/>
-          <p:cNvSpPr txBox="1"/>
-          <p:nvPr/>
-        </p:nvSpPr>
-        <p:spPr>
-          <a:xfrm>
-            <a:off x="8229600" y="2011680"/>
-            <a:ext cx="3291840" cy="1097280"/>
-          </a:xfrm>
-          <a:prstGeom prst="rect">
-            <a:avLst/>
-          </a:prstGeom>
-          <a:noFill/>
-        </p:spPr>
-        <p:txBody>
-          <a:bodyPr wrap="none">
-            <a:spAutoFit/>
-          </a:bodyPr>
-          <a:lstStyle/>
-          <a:p>
-            <a:pPr algn="ctr">
-              <a:defRPr sz="9000" b="1">
-                <a:solidFill>
-                  <a:srgbClr val="2E75B6"/>
-                </a:solidFill>
-                <a:latin typeface="Arial"/>
-              </a:defRPr>
-            </a:pPr>
-            <a:r>
-              <a:t>0</a:t>
+              <a:defRPr sz="5600" b="1">
+                <a:solidFill>
+                  <a:srgbClr val="2EB8C8"/>
+                </a:solidFill>
+                <a:latin typeface="Arial"/>
+              </a:defRPr>
+            </a:pPr>
+            <a:r>
+              <a:t>0,858</a:t>
             </a:r>
           </a:p>
         </p:txBody>
@@ -3502,22 +3499,22 @@
         </p:nvSpPr>
         <p:spPr>
           <a:xfrm>
-            <a:off x="822960" y="3840480"/>
-            <a:ext cx="10515600" cy="548640"/>
-          </a:xfrm>
-          <a:prstGeom prst="rect">
-            <a:avLst/>
-          </a:prstGeom>
-          <a:noFill/>
-        </p:spPr>
-        <p:txBody>
-          <a:bodyPr wrap="none">
-            <a:spAutoFit/>
-          </a:bodyPr>
-          <a:lstStyle/>
-          <a:p>
-            <a:pPr>
-              <a:defRPr sz="2200">
+            <a:off x="7863840" y="3291840"/>
+            <a:ext cx="3749039" cy="640080"/>
+          </a:xfrm>
+          <a:prstGeom prst="rect">
+            <a:avLst/>
+          </a:prstGeom>
+          <a:noFill/>
+        </p:spPr>
+        <p:txBody>
+          <a:bodyPr wrap="square">
+            <a:spAutoFit/>
+          </a:bodyPr>
+          <a:lstStyle/>
+          <a:p>
+            <a:pPr>
+              <a:defRPr sz="1900" b="0">
                 <a:solidFill>
                   <a:srgbClr val="595959"/>
                 </a:solidFill>
@@ -3525,7 +3522,7 @@
               </a:defRPr>
             </a:pPr>
             <a:r>
-              <a:t>KHỚP / GẦN / VƯỢT</a:t>
+              <a:t>• ADGR 0,858 ≈ Mix &gt; Hybrid</a:t>
             </a:r>
           </a:p>
         </p:txBody>
@@ -3538,22 +3535,22 @@
         </p:nvSpPr>
         <p:spPr>
           <a:xfrm>
-            <a:off x="822960" y="4343400"/>
-            <a:ext cx="10515600" cy="548640"/>
-          </a:xfrm>
-          <a:prstGeom prst="rect">
-            <a:avLst/>
-          </a:prstGeom>
-          <a:noFill/>
-        </p:spPr>
-        <p:txBody>
-          <a:bodyPr wrap="none">
-            <a:spAutoFit/>
-          </a:bodyPr>
-          <a:lstStyle/>
-          <a:p>
-            <a:pPr>
-              <a:defRPr sz="2200">
+            <a:off x="7863840" y="3895344"/>
+            <a:ext cx="3749039" cy="640080"/>
+          </a:xfrm>
+          <a:prstGeom prst="rect">
+            <a:avLst/>
+          </a:prstGeom>
+          <a:noFill/>
+        </p:spPr>
+        <p:txBody>
+          <a:bodyPr wrap="square">
+            <a:spAutoFit/>
+          </a:bodyPr>
+          <a:lstStyle/>
+          <a:p>
+            <a:pPr>
+              <a:defRPr sz="1900" b="0">
                 <a:solidFill>
                   <a:srgbClr val="595959"/>
                 </a:solidFill>
@@ -3561,7 +3558,7 @@
               </a:defRPr>
             </a:pPr>
             <a:r>
-              <a:t>GIẢI THÍCH ĐƯỢC</a:t>
+              <a:t>• SEM 0,046 (ngắn thứ hai)</a:t>
             </a:r>
           </a:p>
         </p:txBody>
@@ -3574,22 +3571,22 @@
         </p:nvSpPr>
         <p:spPr>
           <a:xfrm>
-            <a:off x="822960" y="4846320"/>
-            <a:ext cx="10515600" cy="548640"/>
-          </a:xfrm>
-          <a:prstGeom prst="rect">
-            <a:avLst/>
-          </a:prstGeom>
-          <a:noFill/>
-        </p:spPr>
-        <p:txBody>
-          <a:bodyPr wrap="none">
-            <a:spAutoFit/>
-          </a:bodyPr>
-          <a:lstStyle/>
-          <a:p>
-            <a:pPr>
-              <a:defRPr sz="2200">
+            <a:off x="7863840" y="4498848"/>
+            <a:ext cx="3749039" cy="640080"/>
+          </a:xfrm>
+          <a:prstGeom prst="rect">
+            <a:avLst/>
+          </a:prstGeom>
+          <a:noFill/>
+        </p:spPr>
+        <p:txBody>
+          <a:bodyPr wrap="square">
+            <a:spAutoFit/>
+          </a:bodyPr>
+          <a:lstStyle/>
+          <a:p>
+            <a:pPr>
+              <a:defRPr sz="1900" b="0">
                 <a:solidFill>
                   <a:srgbClr val="595959"/>
                 </a:solidFill>
@@ -3597,43 +3594,7 @@
               </a:defRPr>
             </a:pPr>
             <a:r>
-              <a:t>KHÔNG GIẢI THÍCH ĐƯỢC</a:t>
-            </a:r>
-          </a:p>
-        </p:txBody>
-      </p:sp>
-      <p:sp>
-        <p:nvSpPr>
-          <p:cNvPr id="10" name="TextBox 9"/>
-          <p:cNvSpPr txBox="1"/>
-          <p:nvPr/>
-        </p:nvSpPr>
-        <p:spPr>
-          <a:xfrm>
-            <a:off x="1097280" y="4754880"/>
-            <a:ext cx="10058400" cy="548640"/>
-          </a:xfrm>
-          <a:prstGeom prst="rect">
-            <a:avLst/>
-          </a:prstGeom>
-          <a:noFill/>
-        </p:spPr>
-        <p:txBody>
-          <a:bodyPr wrap="none">
-            <a:spAutoFit/>
-          </a:bodyPr>
-          <a:lstStyle/>
-          <a:p>
-            <a:pPr>
-              <a:defRPr sz="2000">
-                <a:solidFill>
-                  <a:srgbClr val="595959"/>
-                </a:solidFill>
-                <a:latin typeface="Arial"/>
-              </a:defRPr>
-            </a:pPr>
-            <a:r>
-              <a:t>Định nghĩa tái hiện thành công: không đòi số giống hệt, chỉ đòi chênh lệch nào cũng có nguyên nhân đã đo.</a:t>
+              <a:t>• 0 đảo hạng trên 10 phương pháp</a:t>
             </a:r>
           </a:p>
         </p:txBody>
@@ -3681,13 +3642,13 @@
           <a:noFill/>
         </p:spPr>
         <p:txBody>
-          <a:bodyPr wrap="none">
+          <a:bodyPr wrap="square">
             <a:spAutoFit/>
           </a:bodyPr>
           <a:lstStyle/>
           <a:p>
             <a:pPr algn="r">
-              <a:defRPr sz="1200">
+              <a:defRPr sz="1200" b="0">
                 <a:solidFill>
                   <a:srgbClr val="595959"/>
                 </a:solidFill>
@@ -3695,7 +3656,7 @@
               </a:defRPr>
             </a:pPr>
             <a:r>
-              <a:t>11/13</a:t>
+              <a:t>11/18</a:t>
             </a:r>
           </a:p>
         </p:txBody>
@@ -3708,22 +3669,58 @@
         </p:nvSpPr>
         <p:spPr>
           <a:xfrm>
-            <a:off x="640080" y="274320"/>
-            <a:ext cx="10881360" cy="914400"/>
-          </a:xfrm>
-          <a:prstGeom prst="rect">
-            <a:avLst/>
-          </a:prstGeom>
-          <a:noFill/>
-        </p:spPr>
-        <p:txBody>
-          <a:bodyPr wrap="none">
-            <a:spAutoFit/>
-          </a:bodyPr>
-          <a:lstStyle/>
-          <a:p>
-            <a:pPr>
-              <a:defRPr sz="3400" b="1">
+            <a:off x="640080" y="320040"/>
+            <a:ext cx="10881360" cy="457200"/>
+          </a:xfrm>
+          <a:prstGeom prst="rect">
+            <a:avLst/>
+          </a:prstGeom>
+          <a:noFill/>
+        </p:spPr>
+        <p:txBody>
+          <a:bodyPr wrap="square">
+            <a:spAutoFit/>
+          </a:bodyPr>
+          <a:lstStyle/>
+          <a:p>
+            <a:pPr>
+              <a:defRPr sz="1400" b="1">
+                <a:solidFill>
+                  <a:srgbClr val="2EB8C8"/>
+                </a:solidFill>
+                <a:latin typeface="Arial"/>
+              </a:defRPr>
+            </a:pPr>
+            <a:r>
+              <a:t>BẢNG 5 — PROMPT</a:t>
+            </a:r>
+          </a:p>
+        </p:txBody>
+      </p:sp>
+      <p:sp>
+        <p:nvSpPr>
+          <p:cNvPr id="4" name="TextBox 3"/>
+          <p:cNvSpPr txBox="1"/>
+          <p:nvPr/>
+        </p:nvSpPr>
+        <p:spPr>
+          <a:xfrm>
+            <a:off x="640080" y="685800"/>
+            <a:ext cx="10881360" cy="822960"/>
+          </a:xfrm>
+          <a:prstGeom prst="rect">
+            <a:avLst/>
+          </a:prstGeom>
+          <a:noFill/>
+        </p:spPr>
+        <p:txBody>
+          <a:bodyPr wrap="square">
+            <a:spAutoFit/>
+          </a:bodyPr>
+          <a:lstStyle/>
+          <a:p>
+            <a:pPr>
+              <a:defRPr sz="3000" b="1">
                 <a:solidFill>
                   <a:srgbClr val="1F3864"/>
                 </a:solidFill>
@@ -3731,35 +3728,95 @@
               </a:defRPr>
             </a:pPr>
             <a:r>
-              <a:t>Khác paper ở đâu? Giới hạn nào?</a:t>
-            </a:r>
-          </a:p>
-        </p:txBody>
-      </p:sp>
-      <p:sp>
-        <p:nvSpPr>
-          <p:cNvPr id="4" name="TextBox 3"/>
-          <p:cNvSpPr txBox="1"/>
-          <p:nvPr/>
-        </p:nvSpPr>
-        <p:spPr>
-          <a:xfrm>
-            <a:off x="822960" y="1463040"/>
-            <a:ext cx="10515600" cy="548640"/>
-          </a:xfrm>
-          <a:prstGeom prst="rect">
-            <a:avLst/>
-          </a:prstGeom>
-          <a:noFill/>
-        </p:spPr>
-        <p:txBody>
-          <a:bodyPr wrap="none">
-            <a:spAutoFit/>
-          </a:bodyPr>
-          <a:lstStyle/>
-          <a:p>
-            <a:pPr>
-              <a:defRPr sz="2100">
+              <a:t>Prompt gốc phạt dài dòng đúng thiết kế</a:t>
+            </a:r>
+          </a:p>
+        </p:txBody>
+      </p:sp>
+      <p:pic>
+        <p:nvPicPr>
+          <p:cNvPr id="5" name="Picture 4" descr="fig_tab5_prompt.png"/>
+          <p:cNvPicPr>
+            <a:picLocks noChangeAspect="1"/>
+          </p:cNvPicPr>
+          <p:nvPr/>
+        </p:nvPicPr>
+        <p:blipFill>
+          <a:blip r:embed="rId2"/>
+          <a:stretch>
+            <a:fillRect/>
+          </a:stretch>
+        </p:blipFill>
+        <p:spPr>
+          <a:xfrm>
+            <a:off x="640080" y="1737360"/>
+            <a:ext cx="6766560" cy="3044952"/>
+          </a:xfrm>
+          <a:prstGeom prst="rect">
+            <a:avLst/>
+          </a:prstGeom>
+        </p:spPr>
+      </p:pic>
+      <p:sp>
+        <p:nvSpPr>
+          <p:cNvPr id="6" name="TextBox 5"/>
+          <p:cNvSpPr txBox="1"/>
+          <p:nvPr/>
+        </p:nvSpPr>
+        <p:spPr>
+          <a:xfrm>
+            <a:off x="7772400" y="1828800"/>
+            <a:ext cx="3474720" cy="1188720"/>
+          </a:xfrm>
+          <a:prstGeom prst="rect">
+            <a:avLst/>
+          </a:prstGeom>
+          <a:noFill/>
+        </p:spPr>
+        <p:txBody>
+          <a:bodyPr wrap="square">
+            <a:spAutoFit/>
+          </a:bodyPr>
+          <a:lstStyle/>
+          <a:p>
+            <a:pPr algn="ctr">
+              <a:defRPr sz="5600" b="1">
+                <a:solidFill>
+                  <a:srgbClr val="2EB8C8"/>
+                </a:solidFill>
+                <a:latin typeface="Arial"/>
+              </a:defRPr>
+            </a:pPr>
+            <a:r>
+              <a:t>−0,08</a:t>
+            </a:r>
+          </a:p>
+        </p:txBody>
+      </p:sp>
+      <p:sp>
+        <p:nvSpPr>
+          <p:cNvPr id="7" name="TextBox 6"/>
+          <p:cNvSpPr txBox="1"/>
+          <p:nvPr/>
+        </p:nvSpPr>
+        <p:spPr>
+          <a:xfrm>
+            <a:off x="7863840" y="3291840"/>
+            <a:ext cx="3749039" cy="640080"/>
+          </a:xfrm>
+          <a:prstGeom prst="rect">
+            <a:avLst/>
+          </a:prstGeom>
+          <a:noFill/>
+        </p:spPr>
+        <p:txBody>
+          <a:bodyPr wrap="square">
+            <a:spAutoFit/>
+          </a:bodyPr>
+          <a:lstStyle/>
+          <a:p>
+            <a:pPr>
+              <a:defRPr sz="1900" b="0">
                 <a:solidFill>
                   <a:srgbClr val="595959"/>
                 </a:solidFill>
@@ -3767,35 +3824,35 @@
               </a:defRPr>
             </a:pPr>
             <a:r>
-              <a:t>GIỐNG (paper Sec 5.1): Qwen2.5-14B, embeddinggemma, Qwen3-Reranker, vLLM, temp 0, chunker H2</a:t>
-            </a:r>
-          </a:p>
-        </p:txBody>
-      </p:sp>
-      <p:sp>
-        <p:nvSpPr>
-          <p:cNvPr id="5" name="TextBox 4"/>
-          <p:cNvSpPr txBox="1"/>
-          <p:nvPr/>
-        </p:nvSpPr>
-        <p:spPr>
-          <a:xfrm>
-            <a:off x="822960" y="2194560"/>
-            <a:ext cx="10515600" cy="548640"/>
-          </a:xfrm>
-          <a:prstGeom prst="rect">
-            <a:avLst/>
-          </a:prstGeom>
-          <a:noFill/>
-        </p:spPr>
-        <p:txBody>
-          <a:bodyPr wrap="none">
-            <a:spAutoFit/>
-          </a:bodyPr>
-          <a:lstStyle/>
-          <a:p>
-            <a:pPr>
-              <a:defRPr sz="2100">
+              <a:t>• Thấp hơn ~0,08 (ADGR 0,778)</a:t>
+            </a:r>
+          </a:p>
+        </p:txBody>
+      </p:sp>
+      <p:sp>
+        <p:nvSpPr>
+          <p:cNvPr id="8" name="TextBox 7"/>
+          <p:cNvSpPr txBox="1"/>
+          <p:nvPr/>
+        </p:nvSpPr>
+        <p:spPr>
+          <a:xfrm>
+            <a:off x="7863840" y="3895344"/>
+            <a:ext cx="3749039" cy="640080"/>
+          </a:xfrm>
+          <a:prstGeom prst="rect">
+            <a:avLst/>
+          </a:prstGeom>
+          <a:noFill/>
+        </p:spPr>
+        <p:txBody>
+          <a:bodyPr wrap="square">
+            <a:spAutoFit/>
+          </a:bodyPr>
+          <a:lstStyle/>
+          <a:p>
+            <a:pPr>
+              <a:defRPr sz="1900" b="0">
                 <a:solidFill>
                   <a:srgbClr val="595959"/>
                 </a:solidFill>
@@ -3803,35 +3860,35 @@
               </a:defRPr>
             </a:pPr>
             <a:r>
-              <a:t>KHÁC: giám khảo solar thay GPT-5.5 • gold chấm tay thay bằng 2 proxy</a:t>
-            </a:r>
-          </a:p>
-        </p:txBody>
-      </p:sp>
-      <p:sp>
-        <p:nvSpPr>
-          <p:cNvPr id="6" name="TextBox 5"/>
-          <p:cNvSpPr txBox="1"/>
-          <p:nvPr/>
-        </p:nvSpPr>
-        <p:spPr>
-          <a:xfrm>
-            <a:off x="822960" y="2926080"/>
-            <a:ext cx="10515600" cy="548640"/>
-          </a:xfrm>
-          <a:prstGeom prst="rect">
-            <a:avLst/>
-          </a:prstGeom>
-          <a:noFill/>
-        </p:spPr>
-        <p:txBody>
-          <a:bodyPr wrap="none">
-            <a:spAutoFit/>
-          </a:bodyPr>
-          <a:lstStyle/>
-          <a:p>
-            <a:pPr>
-              <a:defRPr sz="2100">
+              <a:t>• Nhóm dài (140 / 104 từ)</a:t>
+            </a:r>
+          </a:p>
+        </p:txBody>
+      </p:sp>
+      <p:sp>
+        <p:nvSpPr>
+          <p:cNvPr id="9" name="TextBox 8"/>
+          <p:cNvSpPr txBox="1"/>
+          <p:nvPr/>
+        </p:nvSpPr>
+        <p:spPr>
+          <a:xfrm>
+            <a:off x="7863840" y="4498848"/>
+            <a:ext cx="3749039" cy="640080"/>
+          </a:xfrm>
+          <a:prstGeom prst="rect">
+            <a:avLst/>
+          </a:prstGeom>
+          <a:noFill/>
+        </p:spPr>
+        <p:txBody>
+          <a:bodyPr wrap="square">
+            <a:spAutoFit/>
+          </a:bodyPr>
+          <a:lstStyle/>
+          <a:p>
+            <a:pPr>
+              <a:defRPr sz="1900" b="0">
                 <a:solidFill>
                   <a:srgbClr val="595959"/>
                 </a:solidFill>
@@ -3839,43 +3896,7 @@
               </a:defRPr>
             </a:pPr>
             <a:r>
-              <a:t>7 standalone miễn phí (khác hẳn 7 model trả phí) • faithfulness chấm tắt 1 bước</a:t>
-            </a:r>
-          </a:p>
-        </p:txBody>
-      </p:sp>
-      <p:sp>
-        <p:nvSpPr>
-          <p:cNvPr id="7" name="TextBox 6"/>
-          <p:cNvSpPr txBox="1"/>
-          <p:nvPr/>
-        </p:nvSpPr>
-        <p:spPr>
-          <a:xfrm>
-            <a:off x="822960" y="3657600"/>
-            <a:ext cx="10515600" cy="548640"/>
-          </a:xfrm>
-          <a:prstGeom prst="rect">
-            <a:avLst/>
-          </a:prstGeom>
-          <a:noFill/>
-        </p:spPr>
-        <p:txBody>
-          <a:bodyPr wrap="none">
-            <a:spAutoFit/>
-          </a:bodyPr>
-          <a:lstStyle/>
-          <a:p>
-            <a:pPr>
-              <a:defRPr sz="2100">
-                <a:solidFill>
-                  <a:srgbClr val="595959"/>
-                </a:solidFill>
-                <a:latin typeface="Arial"/>
-              </a:defRPr>
-            </a:pPr>
-            <a:r>
-              <a:t>Giới hạn: LCR 0,82 (chunk to) • đồng thuận giám khảo κ 0,19 • thiếu top-K thích ứng</a:t>
+              <a:t>  rớt mạnh nhất</a:t>
             </a:r>
           </a:p>
         </p:txBody>
@@ -3923,13 +3944,13 @@
           <a:noFill/>
         </p:spPr>
         <p:txBody>
-          <a:bodyPr wrap="none">
+          <a:bodyPr wrap="square">
             <a:spAutoFit/>
           </a:bodyPr>
           <a:lstStyle/>
           <a:p>
             <a:pPr algn="r">
-              <a:defRPr sz="1200">
+              <a:defRPr sz="1200" b="0">
                 <a:solidFill>
                   <a:srgbClr val="595959"/>
                 </a:solidFill>
@@ -3937,7 +3958,7 @@
               </a:defRPr>
             </a:pPr>
             <a:r>
-              <a:t>12/13</a:t>
+              <a:t>12/18</a:t>
             </a:r>
           </a:p>
         </p:txBody>
@@ -3950,22 +3971,58 @@
         </p:nvSpPr>
         <p:spPr>
           <a:xfrm>
-            <a:off x="640080" y="274320"/>
-            <a:ext cx="10881360" cy="914400"/>
-          </a:xfrm>
-          <a:prstGeom prst="rect">
-            <a:avLst/>
-          </a:prstGeom>
-          <a:noFill/>
-        </p:spPr>
-        <p:txBody>
-          <a:bodyPr wrap="none">
-            <a:spAutoFit/>
-          </a:bodyPr>
-          <a:lstStyle/>
-          <a:p>
-            <a:pPr>
-              <a:defRPr sz="3400" b="1">
+            <a:off x="640080" y="320040"/>
+            <a:ext cx="10881360" cy="457200"/>
+          </a:xfrm>
+          <a:prstGeom prst="rect">
+            <a:avLst/>
+          </a:prstGeom>
+          <a:noFill/>
+        </p:spPr>
+        <p:txBody>
+          <a:bodyPr wrap="square">
+            <a:spAutoFit/>
+          </a:bodyPr>
+          <a:lstStyle/>
+          <a:p>
+            <a:pPr>
+              <a:defRPr sz="1400" b="1">
+                <a:solidFill>
+                  <a:srgbClr val="2EB8C8"/>
+                </a:solidFill>
+                <a:latin typeface="Arial"/>
+              </a:defRPr>
+            </a:pPr>
+            <a:r>
+              <a:t>BẢNG 6 — CHI PHÍ</a:t>
+            </a:r>
+          </a:p>
+        </p:txBody>
+      </p:sp>
+      <p:sp>
+        <p:nvSpPr>
+          <p:cNvPr id="4" name="TextBox 3"/>
+          <p:cNvSpPr txBox="1"/>
+          <p:nvPr/>
+        </p:nvSpPr>
+        <p:spPr>
+          <a:xfrm>
+            <a:off x="640080" y="685800"/>
+            <a:ext cx="10881360" cy="822960"/>
+          </a:xfrm>
+          <a:prstGeom prst="rect">
+            <a:avLst/>
+          </a:prstGeom>
+          <a:noFill/>
+        </p:spPr>
+        <p:txBody>
+          <a:bodyPr wrap="square">
+            <a:spAutoFit/>
+          </a:bodyPr>
+          <a:lstStyle/>
+          <a:p>
+            <a:pPr>
+              <a:defRPr sz="3000" b="1">
                 <a:solidFill>
                   <a:srgbClr val="1F3864"/>
                 </a:solidFill>
@@ -3973,35 +4030,95 @@
               </a:defRPr>
             </a:pPr>
             <a:r>
-              <a:t>Giai đoạn 2: 4 đề xuất (tổng ~15h GPU + ~$5)</a:t>
-            </a:r>
-          </a:p>
-        </p:txBody>
-      </p:sp>
-      <p:sp>
-        <p:nvSpPr>
-          <p:cNvPr id="4" name="TextBox 3"/>
-          <p:cNvSpPr txBox="1"/>
-          <p:nvPr/>
-        </p:nvSpPr>
-        <p:spPr>
-          <a:xfrm>
-            <a:off x="822960" y="1463040"/>
-            <a:ext cx="10515600" cy="548640"/>
-          </a:xfrm>
-          <a:prstGeom prst="rect">
-            <a:avLst/>
-          </a:prstGeom>
-          <a:noFill/>
-        </p:spPr>
-        <p:txBody>
-          <a:bodyPr wrap="none">
-            <a:spAutoFit/>
-          </a:bodyPr>
-          <a:lstStyle/>
-          <a:p>
-            <a:pPr>
-              <a:defRPr sz="2200">
+              <a:t>Rẻ hơn paper mọi mặt</a:t>
+            </a:r>
+          </a:p>
+        </p:txBody>
+      </p:sp>
+      <p:pic>
+        <p:nvPicPr>
+          <p:cNvPr id="5" name="Picture 4" descr="fig_tab6_eff.png"/>
+          <p:cNvPicPr>
+            <a:picLocks noChangeAspect="1"/>
+          </p:cNvPicPr>
+          <p:nvPr/>
+        </p:nvPicPr>
+        <p:blipFill>
+          <a:blip r:embed="rId2"/>
+          <a:stretch>
+            <a:fillRect/>
+          </a:stretch>
+        </p:blipFill>
+        <p:spPr>
+          <a:xfrm>
+            <a:off x="640080" y="1737360"/>
+            <a:ext cx="6766560" cy="2875788"/>
+          </a:xfrm>
+          <a:prstGeom prst="rect">
+            <a:avLst/>
+          </a:prstGeom>
+        </p:spPr>
+      </p:pic>
+      <p:sp>
+        <p:nvSpPr>
+          <p:cNvPr id="6" name="TextBox 5"/>
+          <p:cNvSpPr txBox="1"/>
+          <p:nvPr/>
+        </p:nvSpPr>
+        <p:spPr>
+          <a:xfrm>
+            <a:off x="7772400" y="1828800"/>
+            <a:ext cx="3474720" cy="1188720"/>
+          </a:xfrm>
+          <a:prstGeom prst="rect">
+            <a:avLst/>
+          </a:prstGeom>
+          <a:noFill/>
+        </p:spPr>
+        <p:txBody>
+          <a:bodyPr wrap="square">
+            <a:spAutoFit/>
+          </a:bodyPr>
+          <a:lstStyle/>
+          <a:p>
+            <a:pPr algn="ctr">
+              <a:defRPr sz="5600" b="1">
+                <a:solidFill>
+                  <a:srgbClr val="2EB8C8"/>
+                </a:solidFill>
+                <a:latin typeface="Arial"/>
+              </a:defRPr>
+            </a:pPr>
+            <a:r>
+              <a:t>−23%</a:t>
+            </a:r>
+          </a:p>
+        </p:txBody>
+      </p:sp>
+      <p:sp>
+        <p:nvSpPr>
+          <p:cNvPr id="7" name="TextBox 6"/>
+          <p:cNvSpPr txBox="1"/>
+          <p:nvPr/>
+        </p:nvSpPr>
+        <p:spPr>
+          <a:xfrm>
+            <a:off x="7863840" y="3291840"/>
+            <a:ext cx="3749039" cy="640080"/>
+          </a:xfrm>
+          <a:prstGeom prst="rect">
+            <a:avLst/>
+          </a:prstGeom>
+          <a:noFill/>
+        </p:spPr>
+        <p:txBody>
+          <a:bodyPr wrap="square">
+            <a:spAutoFit/>
+          </a:bodyPr>
+          <a:lstStyle/>
+          <a:p>
+            <a:pPr>
+              <a:defRPr sz="1900" b="0">
                 <a:solidFill>
                   <a:srgbClr val="595959"/>
                 </a:solidFill>
@@ -4009,35 +4126,35 @@
               </a:defRPr>
             </a:pPr>
             <a:r>
-              <a:t>1. Pipeline thích ứng theo câu hỏi (~4h + ~$1): câu dễ bỏ qua đồ thị, rẻ hơn ~10 lần</a:t>
-            </a:r>
-          </a:p>
-        </p:txBody>
-      </p:sp>
-      <p:sp>
-        <p:nvSpPr>
-          <p:cNvPr id="5" name="TextBox 4"/>
-          <p:cNvSpPr txBox="1"/>
-          <p:nvPr/>
-        </p:nvSpPr>
-        <p:spPr>
-          <a:xfrm>
-            <a:off x="822960" y="2240280"/>
-            <a:ext cx="10515600" cy="548640"/>
-          </a:xfrm>
-          <a:prstGeom prst="rect">
-            <a:avLst/>
-          </a:prstGeom>
-          <a:noFill/>
-        </p:spPr>
-        <p:txBody>
-          <a:bodyPr wrap="none">
-            <a:spAutoFit/>
-          </a:bodyPr>
-          <a:lstStyle/>
-          <a:p>
-            <a:pPr>
-              <a:defRPr sz="2200">
+              <a:t>• Token 3.441 vs 4.490 (−23%)</a:t>
+            </a:r>
+          </a:p>
+        </p:txBody>
+      </p:sp>
+      <p:sp>
+        <p:nvSpPr>
+          <p:cNvPr id="8" name="TextBox 7"/>
+          <p:cNvSpPr txBox="1"/>
+          <p:nvPr/>
+        </p:nvSpPr>
+        <p:spPr>
+          <a:xfrm>
+            <a:off x="7863840" y="3895344"/>
+            <a:ext cx="3749039" cy="640080"/>
+          </a:xfrm>
+          <a:prstGeom prst="rect">
+            <a:avLst/>
+          </a:prstGeom>
+          <a:noFill/>
+        </p:spPr>
+        <p:txBody>
+          <a:bodyPr wrap="square">
+            <a:spAutoFit/>
+          </a:bodyPr>
+          <a:lstStyle/>
+          <a:p>
+            <a:pPr>
+              <a:defRPr sz="1900" b="0">
                 <a:solidFill>
                   <a:srgbClr val="595959"/>
                 </a:solidFill>
@@ -4045,35 +4162,35 @@
               </a:defRPr>
             </a:pPr>
             <a:r>
-              <a:t>2. Trộn hạng thay vì xếp hạng đè (~3h): giữ cả hai tín hiệu, không cần sinh đáp án mới</a:t>
-            </a:r>
-          </a:p>
-        </p:txBody>
-      </p:sp>
-      <p:sp>
-        <p:nvSpPr>
-          <p:cNvPr id="6" name="TextBox 5"/>
-          <p:cNvSpPr txBox="1"/>
-          <p:nvPr/>
-        </p:nvSpPr>
-        <p:spPr>
-          <a:xfrm>
-            <a:off x="822960" y="3017520"/>
-            <a:ext cx="10515600" cy="548640"/>
-          </a:xfrm>
-          <a:prstGeom prst="rect">
-            <a:avLst/>
-          </a:prstGeom>
-          <a:noFill/>
-        </p:spPr>
-        <p:txBody>
-          <a:bodyPr wrap="none">
-            <a:spAutoFit/>
-          </a:bodyPr>
-          <a:lstStyle/>
-          <a:p>
-            <a:pPr>
-              <a:defRPr sz="2200">
+              <a:t>• Tổng 9,85s → 8,18s</a:t>
+            </a:r>
+          </a:p>
+        </p:txBody>
+      </p:sp>
+      <p:sp>
+        <p:nvSpPr>
+          <p:cNvPr id="9" name="TextBox 8"/>
+          <p:cNvSpPr txBox="1"/>
+          <p:nvPr/>
+        </p:nvSpPr>
+        <p:spPr>
+          <a:xfrm>
+            <a:off x="7863840" y="4498848"/>
+            <a:ext cx="3749039" cy="640080"/>
+          </a:xfrm>
+          <a:prstGeom prst="rect">
+            <a:avLst/>
+          </a:prstGeom>
+          <a:noFill/>
+        </p:spPr>
+        <p:txBody>
+          <a:bodyPr wrap="square">
+            <a:spAutoFit/>
+          </a:bodyPr>
+          <a:lstStyle/>
+          <a:p>
+            <a:pPr>
+              <a:defRPr sz="1900" b="0">
                 <a:solidFill>
                   <a:srgbClr val="595959"/>
                 </a:solidFill>
@@ -4081,43 +4198,7 @@
               </a:defRPr>
             </a:pPr>
             <a:r>
-              <a:t>3. Dừng khi đủ bằng chứng (~5h): thay top-K cố định — đúng hướng tác giả để ngỏ</a:t>
-            </a:r>
-          </a:p>
-        </p:txBody>
-      </p:sp>
-      <p:sp>
-        <p:nvSpPr>
-          <p:cNvPr id="7" name="TextBox 6"/>
-          <p:cNvSpPr txBox="1"/>
-          <p:nvPr/>
-        </p:nvSpPr>
-        <p:spPr>
-          <a:xfrm>
-            <a:off x="822960" y="3794760"/>
-            <a:ext cx="10515600" cy="548640"/>
-          </a:xfrm>
-          <a:prstGeom prst="rect">
-            <a:avLst/>
-          </a:prstGeom>
-          <a:noFill/>
-        </p:spPr>
-        <p:txBody>
-          <a:bodyPr wrap="none">
-            <a:spAutoFit/>
-          </a:bodyPr>
-          <a:lstStyle/>
-          <a:p>
-            <a:pPr>
-              <a:defRPr sz="2200">
-                <a:solidFill>
-                  <a:srgbClr val="595959"/>
-                </a:solidFill>
-                <a:latin typeface="Arial"/>
-              </a:defRPr>
-            </a:pPr>
-            <a:r>
-              <a:t>4. Khống chế độ dài câu trả lời (~4h): câu ngắn đã khớp paper 0,89</a:t>
+              <a:t>• Đúng đánh đổi ADGR quảng cáo</a:t>
             </a:r>
           </a:p>
         </p:txBody>
@@ -4165,13 +4246,13 @@
           <a:noFill/>
         </p:spPr>
         <p:txBody>
-          <a:bodyPr wrap="none">
+          <a:bodyPr wrap="square">
             <a:spAutoFit/>
           </a:bodyPr>
           <a:lstStyle/>
           <a:p>
             <a:pPr algn="r">
-              <a:defRPr sz="1200">
+              <a:defRPr sz="1200" b="0">
                 <a:solidFill>
                   <a:srgbClr val="595959"/>
                 </a:solidFill>
@@ -4179,7 +4260,7 @@
               </a:defRPr>
             </a:pPr>
             <a:r>
-              <a:t>13/13</a:t>
+              <a:t>13/18</a:t>
             </a:r>
           </a:p>
         </p:txBody>
@@ -4192,16 +4273,656 @@
         </p:nvSpPr>
         <p:spPr>
           <a:xfrm>
-            <a:off x="640080" y="914400"/>
-            <a:ext cx="10881360" cy="914400"/>
-          </a:xfrm>
-          <a:prstGeom prst="rect">
-            <a:avLst/>
-          </a:prstGeom>
-          <a:noFill/>
-        </p:spPr>
-        <p:txBody>
-          <a:bodyPr wrap="none">
+            <a:off x="640080" y="320040"/>
+            <a:ext cx="10881360" cy="457200"/>
+          </a:xfrm>
+          <a:prstGeom prst="rect">
+            <a:avLst/>
+          </a:prstGeom>
+          <a:noFill/>
+        </p:spPr>
+        <p:txBody>
+          <a:bodyPr wrap="square">
+            <a:spAutoFit/>
+          </a:bodyPr>
+          <a:lstStyle/>
+          <a:p>
+            <a:pPr>
+              <a:defRPr sz="1400" b="1">
+                <a:solidFill>
+                  <a:srgbClr val="2EB8C8"/>
+                </a:solidFill>
+                <a:latin typeface="Arial"/>
+              </a:defRPr>
+            </a:pPr>
+            <a:r>
+              <a:t>BẢNG 7 — ABLATION</a:t>
+            </a:r>
+          </a:p>
+        </p:txBody>
+      </p:sp>
+      <p:sp>
+        <p:nvSpPr>
+          <p:cNvPr id="4" name="TextBox 3"/>
+          <p:cNvSpPr txBox="1"/>
+          <p:nvPr/>
+        </p:nvSpPr>
+        <p:spPr>
+          <a:xfrm>
+            <a:off x="640080" y="685800"/>
+            <a:ext cx="10881360" cy="822960"/>
+          </a:xfrm>
+          <a:prstGeom prst="rect">
+            <a:avLst/>
+          </a:prstGeom>
+          <a:noFill/>
+        </p:spPr>
+        <p:txBody>
+          <a:bodyPr wrap="square">
+            <a:spAutoFit/>
+          </a:bodyPr>
+          <a:lstStyle/>
+          <a:p>
+            <a:pPr>
+              <a:defRPr sz="3000" b="1">
+                <a:solidFill>
+                  <a:srgbClr val="1F3864"/>
+                </a:solidFill>
+                <a:latin typeface="Arial"/>
+              </a:defRPr>
+            </a:pPr>
+            <a:r>
+              <a:t>Tắt module nào cũng đau đúng thứ tự</a:t>
+            </a:r>
+          </a:p>
+        </p:txBody>
+      </p:sp>
+      <p:pic>
+        <p:nvPicPr>
+          <p:cNvPr id="5" name="Picture 4" descr="fig_tab7_abl.png"/>
+          <p:cNvPicPr>
+            <a:picLocks noChangeAspect="1"/>
+          </p:cNvPicPr>
+          <p:nvPr/>
+        </p:nvPicPr>
+        <p:blipFill>
+          <a:blip r:embed="rId2"/>
+          <a:stretch>
+            <a:fillRect/>
+          </a:stretch>
+        </p:blipFill>
+        <p:spPr>
+          <a:xfrm>
+            <a:off x="640080" y="1737360"/>
+            <a:ext cx="6766560" cy="3214116"/>
+          </a:xfrm>
+          <a:prstGeom prst="rect">
+            <a:avLst/>
+          </a:prstGeom>
+        </p:spPr>
+      </p:pic>
+      <p:sp>
+        <p:nvSpPr>
+          <p:cNvPr id="6" name="TextBox 5"/>
+          <p:cNvSpPr txBox="1"/>
+          <p:nvPr/>
+        </p:nvSpPr>
+        <p:spPr>
+          <a:xfrm>
+            <a:off x="7772400" y="1828800"/>
+            <a:ext cx="3474720" cy="1188720"/>
+          </a:xfrm>
+          <a:prstGeom prst="rect">
+            <a:avLst/>
+          </a:prstGeom>
+          <a:noFill/>
+        </p:spPr>
+        <p:txBody>
+          <a:bodyPr wrap="square">
+            <a:spAutoFit/>
+          </a:bodyPr>
+          <a:lstStyle/>
+          <a:p>
+            <a:pPr algn="ctr">
+              <a:defRPr sz="5600" b="1">
+                <a:solidFill>
+                  <a:srgbClr val="2EB8C8"/>
+                </a:solidFill>
+                <a:latin typeface="Arial"/>
+              </a:defRPr>
+            </a:pPr>
+            <a:r>
+              <a:t>0,60→0,88</a:t>
+            </a:r>
+          </a:p>
+        </p:txBody>
+      </p:sp>
+      <p:sp>
+        <p:nvSpPr>
+          <p:cNvPr id="7" name="TextBox 6"/>
+          <p:cNvSpPr txBox="1"/>
+          <p:nvPr/>
+        </p:nvSpPr>
+        <p:spPr>
+          <a:xfrm>
+            <a:off x="7863840" y="3291840"/>
+            <a:ext cx="3749039" cy="640080"/>
+          </a:xfrm>
+          <a:prstGeom prst="rect">
+            <a:avLst/>
+          </a:prstGeom>
+          <a:noFill/>
+        </p:spPr>
+        <p:txBody>
+          <a:bodyPr wrap="square">
+            <a:spAutoFit/>
+          </a:bodyPr>
+          <a:lstStyle/>
+          <a:p>
+            <a:pPr>
+              <a:defRPr sz="1900" b="0">
+                <a:solidFill>
+                  <a:srgbClr val="595959"/>
+                </a:solidFill>
+                <a:latin typeface="Arial"/>
+              </a:defRPr>
+            </a:pPr>
+            <a:r>
+              <a:t>• Paper: 0,60 → 0,88</a:t>
+            </a:r>
+          </a:p>
+        </p:txBody>
+      </p:sp>
+      <p:sp>
+        <p:nvSpPr>
+          <p:cNvPr id="8" name="TextBox 7"/>
+          <p:cNvSpPr txBox="1"/>
+          <p:nvPr/>
+        </p:nvSpPr>
+        <p:spPr>
+          <a:xfrm>
+            <a:off x="7863840" y="3895344"/>
+            <a:ext cx="3749039" cy="640080"/>
+          </a:xfrm>
+          <a:prstGeom prst="rect">
+            <a:avLst/>
+          </a:prstGeom>
+          <a:noFill/>
+        </p:spPr>
+        <p:txBody>
+          <a:bodyPr wrap="square">
+            <a:spAutoFit/>
+          </a:bodyPr>
+          <a:lstStyle/>
+          <a:p>
+            <a:pPr>
+              <a:defRPr sz="1900" b="0">
+                <a:solidFill>
+                  <a:srgbClr val="595959"/>
+                </a:solidFill>
+                <a:latin typeface="Arial"/>
+              </a:defRPr>
+            </a:pPr>
+            <a:r>
+              <a:t>• Anchor quan trọng nhất</a:t>
+            </a:r>
+          </a:p>
+        </p:txBody>
+      </p:sp>
+      <p:sp>
+        <p:nvSpPr>
+          <p:cNvPr id="9" name="TextBox 8"/>
+          <p:cNvSpPr txBox="1"/>
+          <p:nvPr/>
+        </p:nvSpPr>
+        <p:spPr>
+          <a:xfrm>
+            <a:off x="7863840" y="4498848"/>
+            <a:ext cx="3749039" cy="640080"/>
+          </a:xfrm>
+          <a:prstGeom prst="rect">
+            <a:avLst/>
+          </a:prstGeom>
+          <a:noFill/>
+        </p:spPr>
+        <p:txBody>
+          <a:bodyPr wrap="square">
+            <a:spAutoFit/>
+          </a:bodyPr>
+          <a:lstStyle/>
+          <a:p>
+            <a:pPr>
+              <a:defRPr sz="1900" b="0">
+                <a:solidFill>
+                  <a:srgbClr val="595959"/>
+                </a:solidFill>
+                <a:latin typeface="Arial"/>
+              </a:defRPr>
+            </a:pPr>
+            <a:r>
+              <a:t>• Hình dáng độ chênh khớp</a:t>
+            </a:r>
+          </a:p>
+        </p:txBody>
+      </p:sp>
+    </p:spTree>
+  </p:cSld>
+  <p:clrMapOvr>
+    <a:masterClrMapping/>
+  </p:clrMapOvr>
+</p:sld>
+</file>
+
+<file path=ppt/slides/slide14.xml><?xml version="1.0" encoding="utf-8"?>
+<p:sld xmlns:a="http://schemas.openxmlformats.org/drawingml/2006/main" xmlns:p="http://schemas.openxmlformats.org/presentationml/2006/main" xmlns:r="http://schemas.openxmlformats.org/officeDocument/2006/relationships">
+  <p:cSld>
+    <p:bg>
+      <p:bgPr>
+        <a:solidFill>
+          <a:srgbClr val="FFFFFF"/>
+        </a:solidFill>
+        <a:effectLst/>
+      </p:bgPr>
+    </p:bg>
+    <p:spTree>
+      <p:nvGrpSpPr>
+        <p:cNvPr id="1" name=""/>
+        <p:cNvGrpSpPr/>
+        <p:nvPr/>
+      </p:nvGrpSpPr>
+      <p:grpSpPr/>
+      <p:sp>
+        <p:nvSpPr>
+          <p:cNvPr id="2" name="TextBox 1"/>
+          <p:cNvSpPr txBox="1"/>
+          <p:nvPr/>
+        </p:nvSpPr>
+        <p:spPr>
+          <a:xfrm>
+            <a:off x="10972800" y="6400800"/>
+            <a:ext cx="914400" cy="365760"/>
+          </a:xfrm>
+          <a:prstGeom prst="rect">
+            <a:avLst/>
+          </a:prstGeom>
+          <a:noFill/>
+        </p:spPr>
+        <p:txBody>
+          <a:bodyPr wrap="square">
+            <a:spAutoFit/>
+          </a:bodyPr>
+          <a:lstStyle/>
+          <a:p>
+            <a:pPr algn="r">
+              <a:defRPr sz="1200" b="0">
+                <a:solidFill>
+                  <a:srgbClr val="595959"/>
+                </a:solidFill>
+                <a:latin typeface="Arial"/>
+              </a:defRPr>
+            </a:pPr>
+            <a:r>
+              <a:t>14/18</a:t>
+            </a:r>
+          </a:p>
+        </p:txBody>
+      </p:sp>
+      <p:sp>
+        <p:nvSpPr>
+          <p:cNvPr id="3" name="TextBox 2"/>
+          <p:cNvSpPr txBox="1"/>
+          <p:nvPr/>
+        </p:nvSpPr>
+        <p:spPr>
+          <a:xfrm>
+            <a:off x="640080" y="320040"/>
+            <a:ext cx="10881360" cy="457200"/>
+          </a:xfrm>
+          <a:prstGeom prst="rect">
+            <a:avLst/>
+          </a:prstGeom>
+          <a:noFill/>
+        </p:spPr>
+        <p:txBody>
+          <a:bodyPr wrap="square">
+            <a:spAutoFit/>
+          </a:bodyPr>
+          <a:lstStyle/>
+          <a:p>
+            <a:pPr>
+              <a:defRPr sz="1400" b="1">
+                <a:solidFill>
+                  <a:srgbClr val="2EB8C8"/>
+                </a:solidFill>
+                <a:latin typeface="Arial"/>
+              </a:defRPr>
+            </a:pPr>
+            <a:r>
+              <a:t>BẢNG 8 — CASE AESCIN</a:t>
+            </a:r>
+          </a:p>
+        </p:txBody>
+      </p:sp>
+      <p:sp>
+        <p:nvSpPr>
+          <p:cNvPr id="4" name="TextBox 3"/>
+          <p:cNvSpPr txBox="1"/>
+          <p:nvPr/>
+        </p:nvSpPr>
+        <p:spPr>
+          <a:xfrm>
+            <a:off x="640080" y="685800"/>
+            <a:ext cx="10881360" cy="822960"/>
+          </a:xfrm>
+          <a:prstGeom prst="rect">
+            <a:avLst/>
+          </a:prstGeom>
+          <a:noFill/>
+        </p:spPr>
+        <p:txBody>
+          <a:bodyPr wrap="square">
+            <a:spAutoFit/>
+          </a:bodyPr>
+          <a:lstStyle/>
+          <a:p>
+            <a:pPr>
+              <a:defRPr sz="3000" b="1">
+                <a:solidFill>
+                  <a:srgbClr val="1F3864"/>
+                </a:solidFill>
+                <a:latin typeface="Arial"/>
+              </a:defRPr>
+            </a:pPr>
+            <a:r>
+              <a:t>Gọn mà trúng (trục log)</a:t>
+            </a:r>
+          </a:p>
+        </p:txBody>
+      </p:sp>
+      <p:pic>
+        <p:nvPicPr>
+          <p:cNvPr id="5" name="Picture 4" descr="fig_tab8_case.png"/>
+          <p:cNvPicPr>
+            <a:picLocks noChangeAspect="1"/>
+          </p:cNvPicPr>
+          <p:nvPr/>
+        </p:nvPicPr>
+        <p:blipFill>
+          <a:blip r:embed="rId2"/>
+          <a:stretch>
+            <a:fillRect/>
+          </a:stretch>
+        </p:blipFill>
+        <p:spPr>
+          <a:xfrm>
+            <a:off x="640080" y="1737360"/>
+            <a:ext cx="6766560" cy="3479945"/>
+          </a:xfrm>
+          <a:prstGeom prst="rect">
+            <a:avLst/>
+          </a:prstGeom>
+        </p:spPr>
+      </p:pic>
+      <p:sp>
+        <p:nvSpPr>
+          <p:cNvPr id="6" name="TextBox 5"/>
+          <p:cNvSpPr txBox="1"/>
+          <p:nvPr/>
+        </p:nvSpPr>
+        <p:spPr>
+          <a:xfrm>
+            <a:off x="7772400" y="1828800"/>
+            <a:ext cx="3474720" cy="1188720"/>
+          </a:xfrm>
+          <a:prstGeom prst="rect">
+            <a:avLst/>
+          </a:prstGeom>
+          <a:noFill/>
+        </p:spPr>
+        <p:txBody>
+          <a:bodyPr wrap="square">
+            <a:spAutoFit/>
+          </a:bodyPr>
+          <a:lstStyle/>
+          <a:p>
+            <a:pPr algn="ctr">
+              <a:defRPr sz="5600" b="1">
+                <a:solidFill>
+                  <a:srgbClr val="2EB8C8"/>
+                </a:solidFill>
+                <a:latin typeface="Arial"/>
+              </a:defRPr>
+            </a:pPr>
+            <a:r>
+              <a:t>139→57</a:t>
+            </a:r>
+          </a:p>
+        </p:txBody>
+      </p:sp>
+      <p:sp>
+        <p:nvSpPr>
+          <p:cNvPr id="7" name="TextBox 6"/>
+          <p:cNvSpPr txBox="1"/>
+          <p:nvPr/>
+        </p:nvSpPr>
+        <p:spPr>
+          <a:xfrm>
+            <a:off x="7863840" y="3291840"/>
+            <a:ext cx="3749039" cy="640080"/>
+          </a:xfrm>
+          <a:prstGeom prst="rect">
+            <a:avLst/>
+          </a:prstGeom>
+          <a:noFill/>
+        </p:spPr>
+        <p:txBody>
+          <a:bodyPr wrap="square">
+            <a:spAutoFit/>
+          </a:bodyPr>
+          <a:lstStyle/>
+          <a:p>
+            <a:pPr>
+              <a:defRPr sz="1900" b="0">
+                <a:solidFill>
+                  <a:srgbClr val="595959"/>
+                </a:solidFill>
+                <a:latin typeface="Arial"/>
+              </a:defRPr>
+            </a:pPr>
+            <a:r>
+              <a:t>• Hybrid 139 (lẫn thuốc khác!)</a:t>
+            </a:r>
+          </a:p>
+        </p:txBody>
+      </p:sp>
+      <p:sp>
+        <p:nvSpPr>
+          <p:cNvPr id="8" name="TextBox 7"/>
+          <p:cNvSpPr txBox="1"/>
+          <p:nvPr/>
+        </p:nvSpPr>
+        <p:spPr>
+          <a:xfrm>
+            <a:off x="7863840" y="3895344"/>
+            <a:ext cx="3749039" cy="640080"/>
+          </a:xfrm>
+          <a:prstGeom prst="rect">
+            <a:avLst/>
+          </a:prstGeom>
+          <a:noFill/>
+        </p:spPr>
+        <p:txBody>
+          <a:bodyPr wrap="square">
+            <a:spAutoFit/>
+          </a:bodyPr>
+          <a:lstStyle/>
+          <a:p>
+            <a:pPr>
+              <a:defRPr sz="1900" b="0">
+                <a:solidFill>
+                  <a:srgbClr val="595959"/>
+                </a:solidFill>
+                <a:latin typeface="Arial"/>
+              </a:defRPr>
+            </a:pPr>
+            <a:r>
+              <a:t>• ADGR giữ đúng 3 cái cần</a:t>
+            </a:r>
+          </a:p>
+        </p:txBody>
+      </p:sp>
+      <p:sp>
+        <p:nvSpPr>
+          <p:cNvPr id="9" name="TextBox 8"/>
+          <p:cNvSpPr txBox="1"/>
+          <p:nvPr/>
+        </p:nvSpPr>
+        <p:spPr>
+          <a:xfrm>
+            <a:off x="7863840" y="4498848"/>
+            <a:ext cx="3749039" cy="640080"/>
+          </a:xfrm>
+          <a:prstGeom prst="rect">
+            <a:avLst/>
+          </a:prstGeom>
+          <a:noFill/>
+        </p:spPr>
+        <p:txBody>
+          <a:bodyPr wrap="square">
+            <a:spAutoFit/>
+          </a:bodyPr>
+          <a:lstStyle/>
+          <a:p>
+            <a:pPr>
+              <a:defRPr sz="1900" b="0">
+                <a:solidFill>
+                  <a:srgbClr val="595959"/>
+                </a:solidFill>
+                <a:latin typeface="Arial"/>
+              </a:defRPr>
+            </a:pPr>
+            <a:r>
+              <a:t>• Ta: 12–14 / 39–41</a:t>
+            </a:r>
+          </a:p>
+        </p:txBody>
+      </p:sp>
+    </p:spTree>
+  </p:cSld>
+  <p:clrMapOvr>
+    <a:masterClrMapping/>
+  </p:clrMapOvr>
+</p:sld>
+</file>
+
+<file path=ppt/slides/slide15.xml><?xml version="1.0" encoding="utf-8"?>
+<p:sld xmlns:a="http://schemas.openxmlformats.org/drawingml/2006/main" xmlns:p="http://schemas.openxmlformats.org/presentationml/2006/main" xmlns:r="http://schemas.openxmlformats.org/officeDocument/2006/relationships">
+  <p:cSld>
+    <p:bg>
+      <p:bgPr>
+        <a:solidFill>
+          <a:srgbClr val="FFFFFF"/>
+        </a:solidFill>
+        <a:effectLst/>
+      </p:bgPr>
+    </p:bg>
+    <p:spTree>
+      <p:nvGrpSpPr>
+        <p:cNvPr id="1" name=""/>
+        <p:cNvGrpSpPr/>
+        <p:nvPr/>
+      </p:nvGrpSpPr>
+      <p:grpSpPr/>
+      <p:sp>
+        <p:nvSpPr>
+          <p:cNvPr id="2" name="TextBox 1"/>
+          <p:cNvSpPr txBox="1"/>
+          <p:nvPr/>
+        </p:nvSpPr>
+        <p:spPr>
+          <a:xfrm>
+            <a:off x="10972800" y="6400800"/>
+            <a:ext cx="914400" cy="365760"/>
+          </a:xfrm>
+          <a:prstGeom prst="rect">
+            <a:avLst/>
+          </a:prstGeom>
+          <a:noFill/>
+        </p:spPr>
+        <p:txBody>
+          <a:bodyPr wrap="square">
+            <a:spAutoFit/>
+          </a:bodyPr>
+          <a:lstStyle/>
+          <a:p>
+            <a:pPr algn="r">
+              <a:defRPr sz="1200" b="0">
+                <a:solidFill>
+                  <a:srgbClr val="595959"/>
+                </a:solidFill>
+                <a:latin typeface="Arial"/>
+              </a:defRPr>
+            </a:pPr>
+            <a:r>
+              <a:t>15/18</a:t>
+            </a:r>
+          </a:p>
+        </p:txBody>
+      </p:sp>
+      <p:sp>
+        <p:nvSpPr>
+          <p:cNvPr id="3" name="TextBox 2"/>
+          <p:cNvSpPr txBox="1"/>
+          <p:nvPr/>
+        </p:nvSpPr>
+        <p:spPr>
+          <a:xfrm>
+            <a:off x="640080" y="320040"/>
+            <a:ext cx="10881360" cy="457200"/>
+          </a:xfrm>
+          <a:prstGeom prst="rect">
+            <a:avLst/>
+          </a:prstGeom>
+          <a:noFill/>
+        </p:spPr>
+        <p:txBody>
+          <a:bodyPr wrap="square">
+            <a:spAutoFit/>
+          </a:bodyPr>
+          <a:lstStyle/>
+          <a:p>
+            <a:pPr>
+              <a:defRPr sz="1400" b="1">
+                <a:solidFill>
+                  <a:srgbClr val="2EB8C8"/>
+                </a:solidFill>
+                <a:latin typeface="Arial"/>
+              </a:defRPr>
+            </a:pPr>
+            <a:r>
+              <a:t>TỔNG KẾT SỐ LIỆU</a:t>
+            </a:r>
+          </a:p>
+        </p:txBody>
+      </p:sp>
+      <p:sp>
+        <p:nvSpPr>
+          <p:cNvPr id="4" name="TextBox 3"/>
+          <p:cNvSpPr txBox="1"/>
+          <p:nvPr/>
+        </p:nvSpPr>
+        <p:spPr>
+          <a:xfrm>
+            <a:off x="640080" y="685800"/>
+            <a:ext cx="10881360" cy="822960"/>
+          </a:xfrm>
+          <a:prstGeom prst="rect">
+            <a:avLst/>
+          </a:prstGeom>
+          <a:noFill/>
+        </p:spPr>
+        <p:txBody>
+          <a:bodyPr wrap="square">
             <a:spAutoFit/>
           </a:bodyPr>
           <a:lstStyle/>
@@ -4215,7 +4936,357 @@
               </a:defRPr>
             </a:pPr>
             <a:r>
-              <a:t>Kết luận</a:t>
+              <a:t>9 — 5 — 0</a:t>
+            </a:r>
+          </a:p>
+        </p:txBody>
+      </p:sp>
+      <p:sp>
+        <p:nvSpPr>
+          <p:cNvPr id="5" name="TextBox 4"/>
+          <p:cNvSpPr txBox="1"/>
+          <p:nvPr/>
+        </p:nvSpPr>
+        <p:spPr>
+          <a:xfrm>
+            <a:off x="914400" y="2011680"/>
+            <a:ext cx="3474720" cy="1188720"/>
+          </a:xfrm>
+          <a:prstGeom prst="rect">
+            <a:avLst/>
+          </a:prstGeom>
+          <a:noFill/>
+        </p:spPr>
+        <p:txBody>
+          <a:bodyPr wrap="square">
+            <a:spAutoFit/>
+          </a:bodyPr>
+          <a:lstStyle/>
+          <a:p>
+            <a:pPr algn="ctr">
+              <a:defRPr sz="9600" b="1">
+                <a:solidFill>
+                  <a:srgbClr val="2EB8C8"/>
+                </a:solidFill>
+                <a:latin typeface="Arial"/>
+              </a:defRPr>
+            </a:pPr>
+            <a:r>
+              <a:t>9</a:t>
+            </a:r>
+          </a:p>
+        </p:txBody>
+      </p:sp>
+      <p:sp>
+        <p:nvSpPr>
+          <p:cNvPr id="6" name="TextBox 5"/>
+          <p:cNvSpPr txBox="1"/>
+          <p:nvPr/>
+        </p:nvSpPr>
+        <p:spPr>
+          <a:xfrm>
+            <a:off x="4572000" y="2011680"/>
+            <a:ext cx="3474720" cy="1188720"/>
+          </a:xfrm>
+          <a:prstGeom prst="rect">
+            <a:avLst/>
+          </a:prstGeom>
+          <a:noFill/>
+        </p:spPr>
+        <p:txBody>
+          <a:bodyPr wrap="square">
+            <a:spAutoFit/>
+          </a:bodyPr>
+          <a:lstStyle/>
+          <a:p>
+            <a:pPr algn="ctr">
+              <a:defRPr sz="9600" b="1">
+                <a:solidFill>
+                  <a:srgbClr val="2EB8C8"/>
+                </a:solidFill>
+                <a:latin typeface="Arial"/>
+              </a:defRPr>
+            </a:pPr>
+            <a:r>
+              <a:t>5</a:t>
+            </a:r>
+          </a:p>
+        </p:txBody>
+      </p:sp>
+      <p:sp>
+        <p:nvSpPr>
+          <p:cNvPr id="7" name="TextBox 6"/>
+          <p:cNvSpPr txBox="1"/>
+          <p:nvPr/>
+        </p:nvSpPr>
+        <p:spPr>
+          <a:xfrm>
+            <a:off x="8229600" y="2011680"/>
+            <a:ext cx="3474720" cy="1188720"/>
+          </a:xfrm>
+          <a:prstGeom prst="rect">
+            <a:avLst/>
+          </a:prstGeom>
+          <a:noFill/>
+        </p:spPr>
+        <p:txBody>
+          <a:bodyPr wrap="square">
+            <a:spAutoFit/>
+          </a:bodyPr>
+          <a:lstStyle/>
+          <a:p>
+            <a:pPr algn="ctr">
+              <a:defRPr sz="9600" b="1">
+                <a:solidFill>
+                  <a:srgbClr val="2EB8C8"/>
+                </a:solidFill>
+                <a:latin typeface="Arial"/>
+              </a:defRPr>
+            </a:pPr>
+            <a:r>
+              <a:t>0</a:t>
+            </a:r>
+          </a:p>
+        </p:txBody>
+      </p:sp>
+      <p:sp>
+        <p:nvSpPr>
+          <p:cNvPr id="8" name="TextBox 7"/>
+          <p:cNvSpPr txBox="1"/>
+          <p:nvPr/>
+        </p:nvSpPr>
+        <p:spPr>
+          <a:xfrm>
+            <a:off x="914400" y="3931920"/>
+            <a:ext cx="10515600" cy="640080"/>
+          </a:xfrm>
+          <a:prstGeom prst="rect">
+            <a:avLst/>
+          </a:prstGeom>
+          <a:noFill/>
+        </p:spPr>
+        <p:txBody>
+          <a:bodyPr wrap="square">
+            <a:spAutoFit/>
+          </a:bodyPr>
+          <a:lstStyle/>
+          <a:p>
+            <a:pPr>
+              <a:defRPr sz="2200" b="0">
+                <a:solidFill>
+                  <a:srgbClr val="595959"/>
+                </a:solidFill>
+                <a:latin typeface="Arial"/>
+              </a:defRPr>
+            </a:pPr>
+            <a:r>
+              <a:t>KHỚP / GẦN / VƯỢT</a:t>
+            </a:r>
+          </a:p>
+        </p:txBody>
+      </p:sp>
+      <p:sp>
+        <p:nvSpPr>
+          <p:cNvPr id="9" name="TextBox 8"/>
+          <p:cNvSpPr txBox="1"/>
+          <p:nvPr/>
+        </p:nvSpPr>
+        <p:spPr>
+          <a:xfrm>
+            <a:off x="914400" y="3932834"/>
+            <a:ext cx="10515600" cy="640080"/>
+          </a:xfrm>
+          <a:prstGeom prst="rect">
+            <a:avLst/>
+          </a:prstGeom>
+          <a:noFill/>
+        </p:spPr>
+        <p:txBody>
+          <a:bodyPr wrap="square">
+            <a:spAutoFit/>
+          </a:bodyPr>
+          <a:lstStyle/>
+          <a:p>
+            <a:pPr>
+              <a:defRPr sz="2200" b="0">
+                <a:solidFill>
+                  <a:srgbClr val="595959"/>
+                </a:solidFill>
+                <a:latin typeface="Arial"/>
+              </a:defRPr>
+            </a:pPr>
+            <a:r>
+              <a:t>GIẢI THÍCH ĐƯỢC</a:t>
+            </a:r>
+          </a:p>
+        </p:txBody>
+      </p:sp>
+      <p:sp>
+        <p:nvSpPr>
+          <p:cNvPr id="10" name="TextBox 9"/>
+          <p:cNvSpPr txBox="1"/>
+          <p:nvPr/>
+        </p:nvSpPr>
+        <p:spPr>
+          <a:xfrm>
+            <a:off x="914400" y="3933748"/>
+            <a:ext cx="10515600" cy="640080"/>
+          </a:xfrm>
+          <a:prstGeom prst="rect">
+            <a:avLst/>
+          </a:prstGeom>
+          <a:noFill/>
+        </p:spPr>
+        <p:txBody>
+          <a:bodyPr wrap="square">
+            <a:spAutoFit/>
+          </a:bodyPr>
+          <a:lstStyle/>
+          <a:p>
+            <a:pPr>
+              <a:defRPr sz="2200" b="0">
+                <a:solidFill>
+                  <a:srgbClr val="595959"/>
+                </a:solidFill>
+                <a:latin typeface="Arial"/>
+              </a:defRPr>
+            </a:pPr>
+            <a:r>
+              <a:t>KHÔNG GIẢI THÍCH ĐƯỢC</a:t>
+            </a:r>
+          </a:p>
+        </p:txBody>
+      </p:sp>
+      <p:sp>
+        <p:nvSpPr>
+          <p:cNvPr id="11" name="TextBox 10"/>
+          <p:cNvSpPr txBox="1"/>
+          <p:nvPr/>
+        </p:nvSpPr>
+        <p:spPr>
+          <a:xfrm>
+            <a:off x="914400" y="5120640"/>
+            <a:ext cx="10332720" cy="731520"/>
+          </a:xfrm>
+          <a:prstGeom prst="rect">
+            <a:avLst/>
+          </a:prstGeom>
+          <a:noFill/>
+        </p:spPr>
+        <p:txBody>
+          <a:bodyPr wrap="square">
+            <a:spAutoFit/>
+          </a:bodyPr>
+          <a:lstStyle/>
+          <a:p>
+            <a:pPr>
+              <a:defRPr sz="2000" b="0">
+                <a:solidFill>
+                  <a:srgbClr val="595959"/>
+                </a:solidFill>
+                <a:latin typeface="Arial"/>
+              </a:defRPr>
+            </a:pPr>
+            <a:r>
+              <a:t>Định nghĩa tái hiện thành công: không đòi số giống hệt — chỉ đòi chênh lệch nào cũng có nguyên nhân đã đo.</a:t>
+            </a:r>
+          </a:p>
+        </p:txBody>
+      </p:sp>
+    </p:spTree>
+  </p:cSld>
+  <p:clrMapOvr>
+    <a:masterClrMapping/>
+  </p:clrMapOvr>
+</p:sld>
+</file>
+
+<file path=ppt/slides/slide16.xml><?xml version="1.0" encoding="utf-8"?>
+<p:sld xmlns:a="http://schemas.openxmlformats.org/drawingml/2006/main" xmlns:p="http://schemas.openxmlformats.org/presentationml/2006/main" xmlns:r="http://schemas.openxmlformats.org/officeDocument/2006/relationships">
+  <p:cSld>
+    <p:bg>
+      <p:bgPr>
+        <a:solidFill>
+          <a:srgbClr val="FFFFFF"/>
+        </a:solidFill>
+        <a:effectLst/>
+      </p:bgPr>
+    </p:bg>
+    <p:spTree>
+      <p:nvGrpSpPr>
+        <p:cNvPr id="1" name=""/>
+        <p:cNvGrpSpPr/>
+        <p:nvPr/>
+      </p:nvGrpSpPr>
+      <p:grpSpPr/>
+      <p:sp>
+        <p:nvSpPr>
+          <p:cNvPr id="2" name="TextBox 1"/>
+          <p:cNvSpPr txBox="1"/>
+          <p:nvPr/>
+        </p:nvSpPr>
+        <p:spPr>
+          <a:xfrm>
+            <a:off x="10972800" y="6400800"/>
+            <a:ext cx="914400" cy="365760"/>
+          </a:xfrm>
+          <a:prstGeom prst="rect">
+            <a:avLst/>
+          </a:prstGeom>
+          <a:noFill/>
+        </p:spPr>
+        <p:txBody>
+          <a:bodyPr wrap="square">
+            <a:spAutoFit/>
+          </a:bodyPr>
+          <a:lstStyle/>
+          <a:p>
+            <a:pPr algn="r">
+              <a:defRPr sz="1200" b="0">
+                <a:solidFill>
+                  <a:srgbClr val="595959"/>
+                </a:solidFill>
+                <a:latin typeface="Arial"/>
+              </a:defRPr>
+            </a:pPr>
+            <a:r>
+              <a:t>16/18</a:t>
+            </a:r>
+          </a:p>
+        </p:txBody>
+      </p:sp>
+      <p:sp>
+        <p:nvSpPr>
+          <p:cNvPr id="3" name="TextBox 2"/>
+          <p:cNvSpPr txBox="1"/>
+          <p:nvPr/>
+        </p:nvSpPr>
+        <p:spPr>
+          <a:xfrm>
+            <a:off x="640080" y="320040"/>
+            <a:ext cx="10881360" cy="457200"/>
+          </a:xfrm>
+          <a:prstGeom prst="rect">
+            <a:avLst/>
+          </a:prstGeom>
+          <a:noFill/>
+        </p:spPr>
+        <p:txBody>
+          <a:bodyPr wrap="square">
+            <a:spAutoFit/>
+          </a:bodyPr>
+          <a:lstStyle/>
+          <a:p>
+            <a:pPr>
+              <a:defRPr sz="1400" b="1">
+                <a:solidFill>
+                  <a:srgbClr val="2EB8C8"/>
+                </a:solidFill>
+                <a:latin typeface="Arial"/>
+              </a:defRPr>
+            </a:pPr>
+            <a:r>
+              <a:t>TRUNG THỰC KHOA HỌC</a:t>
             </a:r>
           </a:p>
         </p:txBody>
@@ -4228,22 +5299,22 @@
         </p:nvSpPr>
         <p:spPr>
           <a:xfrm>
-            <a:off x="822960" y="2194560"/>
-            <a:ext cx="10515600" cy="1828800"/>
-          </a:xfrm>
-          <a:prstGeom prst="rect">
-            <a:avLst/>
-          </a:prstGeom>
-          <a:noFill/>
-        </p:spPr>
-        <p:txBody>
-          <a:bodyPr wrap="none">
-            <a:spAutoFit/>
-          </a:bodyPr>
-          <a:lstStyle/>
-          <a:p>
-            <a:pPr>
-              <a:defRPr sz="2800" b="1">
+            <a:off x="640080" y="685800"/>
+            <a:ext cx="10881360" cy="822960"/>
+          </a:xfrm>
+          <a:prstGeom prst="rect">
+            <a:avLst/>
+          </a:prstGeom>
+          <a:noFill/>
+        </p:spPr>
+        <p:txBody>
+          <a:bodyPr wrap="square">
+            <a:spAutoFit/>
+          </a:bodyPr>
+          <a:lstStyle/>
+          <a:p>
+            <a:pPr>
+              <a:defRPr sz="3200" b="1">
                 <a:solidFill>
                   <a:srgbClr val="1F3864"/>
                 </a:solidFill>
@@ -4251,6 +5322,490 @@
               </a:defRPr>
             </a:pPr>
             <a:r>
+              <a:t>Giống paper ở đâu? Khác ở đâu? Giới hạn nào?</a:t>
+            </a:r>
+          </a:p>
+        </p:txBody>
+      </p:sp>
+      <p:sp>
+        <p:nvSpPr>
+          <p:cNvPr id="5" name="TextBox 4"/>
+          <p:cNvSpPr txBox="1"/>
+          <p:nvPr/>
+        </p:nvSpPr>
+        <p:spPr>
+          <a:xfrm>
+            <a:off x="822960" y="1828800"/>
+            <a:ext cx="10515600" cy="640080"/>
+          </a:xfrm>
+          <a:prstGeom prst="rect">
+            <a:avLst/>
+          </a:prstGeom>
+          <a:noFill/>
+        </p:spPr>
+        <p:txBody>
+          <a:bodyPr wrap="square">
+            <a:spAutoFit/>
+          </a:bodyPr>
+          <a:lstStyle/>
+          <a:p>
+            <a:pPr>
+              <a:defRPr sz="2100" b="0">
+                <a:solidFill>
+                  <a:srgbClr val="595959"/>
+                </a:solidFill>
+                <a:latin typeface="Arial"/>
+              </a:defRPr>
+            </a:pPr>
+            <a:r>
+              <a:t>GIỐNG (paper Sec 5.1): Qwen2.5-14B • embeddinggemma • Qwen3-Reranker • vLLM • temp 0 • chunker H2</a:t>
+            </a:r>
+          </a:p>
+        </p:txBody>
+      </p:sp>
+      <p:sp>
+        <p:nvSpPr>
+          <p:cNvPr id="6" name="TextBox 5"/>
+          <p:cNvSpPr txBox="1"/>
+          <p:nvPr/>
+        </p:nvSpPr>
+        <p:spPr>
+          <a:xfrm>
+            <a:off x="822960" y="2651760"/>
+            <a:ext cx="10515600" cy="640080"/>
+          </a:xfrm>
+          <a:prstGeom prst="rect">
+            <a:avLst/>
+          </a:prstGeom>
+          <a:noFill/>
+        </p:spPr>
+        <p:txBody>
+          <a:bodyPr wrap="square">
+            <a:spAutoFit/>
+          </a:bodyPr>
+          <a:lstStyle/>
+          <a:p>
+            <a:pPr>
+              <a:defRPr sz="2100" b="0">
+                <a:solidFill>
+                  <a:srgbClr val="595959"/>
+                </a:solidFill>
+                <a:latin typeface="Arial"/>
+              </a:defRPr>
+            </a:pPr>
+            <a:r>
+              <a:t>KHÁC: giám khảo solar thay GPT-5.5 • gold chấm tay thay bằng 2 proxy • 7 standalone miễn phí • chấm tắt 1 bước</a:t>
+            </a:r>
+          </a:p>
+        </p:txBody>
+      </p:sp>
+      <p:sp>
+        <p:nvSpPr>
+          <p:cNvPr id="7" name="TextBox 6"/>
+          <p:cNvSpPr txBox="1"/>
+          <p:nvPr/>
+        </p:nvSpPr>
+        <p:spPr>
+          <a:xfrm>
+            <a:off x="822960" y="3474720"/>
+            <a:ext cx="10515600" cy="640080"/>
+          </a:xfrm>
+          <a:prstGeom prst="rect">
+            <a:avLst/>
+          </a:prstGeom>
+          <a:noFill/>
+        </p:spPr>
+        <p:txBody>
+          <a:bodyPr wrap="square">
+            <a:spAutoFit/>
+          </a:bodyPr>
+          <a:lstStyle/>
+          <a:p>
+            <a:pPr>
+              <a:defRPr sz="2100" b="0">
+                <a:solidFill>
+                  <a:srgbClr val="595959"/>
+                </a:solidFill>
+                <a:latin typeface="Arial"/>
+              </a:defRPr>
+            </a:pPr>
+            <a:r>
+              <a:t>GIỚI HẠN: LCR 0,82 (chunk to) • đồng thuận giám khảo κ 0,19 • top-K cố định chưa thích ứng</a:t>
+            </a:r>
+          </a:p>
+        </p:txBody>
+      </p:sp>
+    </p:spTree>
+  </p:cSld>
+  <p:clrMapOvr>
+    <a:masterClrMapping/>
+  </p:clrMapOvr>
+</p:sld>
+</file>
+
+<file path=ppt/slides/slide17.xml><?xml version="1.0" encoding="utf-8"?>
+<p:sld xmlns:a="http://schemas.openxmlformats.org/drawingml/2006/main" xmlns:p="http://schemas.openxmlformats.org/presentationml/2006/main" xmlns:r="http://schemas.openxmlformats.org/officeDocument/2006/relationships">
+  <p:cSld>
+    <p:bg>
+      <p:bgPr>
+        <a:solidFill>
+          <a:srgbClr val="FFFFFF"/>
+        </a:solidFill>
+        <a:effectLst/>
+      </p:bgPr>
+    </p:bg>
+    <p:spTree>
+      <p:nvGrpSpPr>
+        <p:cNvPr id="1" name=""/>
+        <p:cNvGrpSpPr/>
+        <p:nvPr/>
+      </p:nvGrpSpPr>
+      <p:grpSpPr/>
+      <p:sp>
+        <p:nvSpPr>
+          <p:cNvPr id="2" name="TextBox 1"/>
+          <p:cNvSpPr txBox="1"/>
+          <p:nvPr/>
+        </p:nvSpPr>
+        <p:spPr>
+          <a:xfrm>
+            <a:off x="10972800" y="6400800"/>
+            <a:ext cx="914400" cy="365760"/>
+          </a:xfrm>
+          <a:prstGeom prst="rect">
+            <a:avLst/>
+          </a:prstGeom>
+          <a:noFill/>
+        </p:spPr>
+        <p:txBody>
+          <a:bodyPr wrap="square">
+            <a:spAutoFit/>
+          </a:bodyPr>
+          <a:lstStyle/>
+          <a:p>
+            <a:pPr algn="r">
+              <a:defRPr sz="1200" b="0">
+                <a:solidFill>
+                  <a:srgbClr val="595959"/>
+                </a:solidFill>
+                <a:latin typeface="Arial"/>
+              </a:defRPr>
+            </a:pPr>
+            <a:r>
+              <a:t>17/18</a:t>
+            </a:r>
+          </a:p>
+        </p:txBody>
+      </p:sp>
+      <p:sp>
+        <p:nvSpPr>
+          <p:cNvPr id="3" name="TextBox 2"/>
+          <p:cNvSpPr txBox="1"/>
+          <p:nvPr/>
+        </p:nvSpPr>
+        <p:spPr>
+          <a:xfrm>
+            <a:off x="640080" y="320040"/>
+            <a:ext cx="10881360" cy="457200"/>
+          </a:xfrm>
+          <a:prstGeom prst="rect">
+            <a:avLst/>
+          </a:prstGeom>
+          <a:noFill/>
+        </p:spPr>
+        <p:txBody>
+          <a:bodyPr wrap="square">
+            <a:spAutoFit/>
+          </a:bodyPr>
+          <a:lstStyle/>
+          <a:p>
+            <a:pPr>
+              <a:defRPr sz="1400" b="1">
+                <a:solidFill>
+                  <a:srgbClr val="2EB8C8"/>
+                </a:solidFill>
+                <a:latin typeface="Arial"/>
+              </a:defRPr>
+            </a:pPr>
+            <a:r>
+              <a:t>HƯỚNG ĐI TIẾP</a:t>
+            </a:r>
+          </a:p>
+        </p:txBody>
+      </p:sp>
+      <p:sp>
+        <p:nvSpPr>
+          <p:cNvPr id="4" name="TextBox 3"/>
+          <p:cNvSpPr txBox="1"/>
+          <p:nvPr/>
+        </p:nvSpPr>
+        <p:spPr>
+          <a:xfrm>
+            <a:off x="640080" y="685800"/>
+            <a:ext cx="10881360" cy="822960"/>
+          </a:xfrm>
+          <a:prstGeom prst="rect">
+            <a:avLst/>
+          </a:prstGeom>
+          <a:noFill/>
+        </p:spPr>
+        <p:txBody>
+          <a:bodyPr wrap="square">
+            <a:spAutoFit/>
+          </a:bodyPr>
+          <a:lstStyle/>
+          <a:p>
+            <a:pPr>
+              <a:defRPr sz="3200" b="1">
+                <a:solidFill>
+                  <a:srgbClr val="1F3864"/>
+                </a:solidFill>
+                <a:latin typeface="Arial"/>
+              </a:defRPr>
+            </a:pPr>
+            <a:r>
+              <a:t>Giai đoạn 2: ~15h GPU + ~$5</a:t>
+            </a:r>
+          </a:p>
+        </p:txBody>
+      </p:sp>
+      <p:sp>
+        <p:nvSpPr>
+          <p:cNvPr id="5" name="TextBox 4"/>
+          <p:cNvSpPr txBox="1"/>
+          <p:nvPr/>
+        </p:nvSpPr>
+        <p:spPr>
+          <a:xfrm>
+            <a:off x="822960" y="1828800"/>
+            <a:ext cx="10515600" cy="640080"/>
+          </a:xfrm>
+          <a:prstGeom prst="rect">
+            <a:avLst/>
+          </a:prstGeom>
+          <a:noFill/>
+        </p:spPr>
+        <p:txBody>
+          <a:bodyPr wrap="square">
+            <a:spAutoFit/>
+          </a:bodyPr>
+          <a:lstStyle/>
+          <a:p>
+            <a:pPr>
+              <a:defRPr sz="2200" b="0">
+                <a:solidFill>
+                  <a:srgbClr val="595959"/>
+                </a:solidFill>
+                <a:latin typeface="Arial"/>
+              </a:defRPr>
+            </a:pPr>
+            <a:r>
+              <a:t>1. Pipeline thích ứng theo câu hỏi (~4h + ~$1) — câu dễ bỏ qua đồ thị, rẻ hơn ~10 lần</a:t>
+            </a:r>
+          </a:p>
+        </p:txBody>
+      </p:sp>
+      <p:sp>
+        <p:nvSpPr>
+          <p:cNvPr id="6" name="TextBox 5"/>
+          <p:cNvSpPr txBox="1"/>
+          <p:nvPr/>
+        </p:nvSpPr>
+        <p:spPr>
+          <a:xfrm>
+            <a:off x="822960" y="2606040"/>
+            <a:ext cx="10515600" cy="640080"/>
+          </a:xfrm>
+          <a:prstGeom prst="rect">
+            <a:avLst/>
+          </a:prstGeom>
+          <a:noFill/>
+        </p:spPr>
+        <p:txBody>
+          <a:bodyPr wrap="square">
+            <a:spAutoFit/>
+          </a:bodyPr>
+          <a:lstStyle/>
+          <a:p>
+            <a:pPr>
+              <a:defRPr sz="2200" b="0">
+                <a:solidFill>
+                  <a:srgbClr val="595959"/>
+                </a:solidFill>
+                <a:latin typeface="Arial"/>
+              </a:defRPr>
+            </a:pPr>
+            <a:r>
+              <a:t>2. Trộn hạng thay vì xếp hạng đè (~3h) — giữ cả hai tín hiệu</a:t>
+            </a:r>
+          </a:p>
+        </p:txBody>
+      </p:sp>
+      <p:sp>
+        <p:nvSpPr>
+          <p:cNvPr id="7" name="TextBox 6"/>
+          <p:cNvSpPr txBox="1"/>
+          <p:nvPr/>
+        </p:nvSpPr>
+        <p:spPr>
+          <a:xfrm>
+            <a:off x="822960" y="3383280"/>
+            <a:ext cx="10515600" cy="640080"/>
+          </a:xfrm>
+          <a:prstGeom prst="rect">
+            <a:avLst/>
+          </a:prstGeom>
+          <a:noFill/>
+        </p:spPr>
+        <p:txBody>
+          <a:bodyPr wrap="square">
+            <a:spAutoFit/>
+          </a:bodyPr>
+          <a:lstStyle/>
+          <a:p>
+            <a:pPr>
+              <a:defRPr sz="2200" b="0">
+                <a:solidFill>
+                  <a:srgbClr val="595959"/>
+                </a:solidFill>
+                <a:latin typeface="Arial"/>
+              </a:defRPr>
+            </a:pPr>
+            <a:r>
+              <a:t>3. Dừng khi đủ bằng chứng (~5h) — thay top-K cố định</a:t>
+            </a:r>
+          </a:p>
+        </p:txBody>
+      </p:sp>
+      <p:sp>
+        <p:nvSpPr>
+          <p:cNvPr id="8" name="TextBox 7"/>
+          <p:cNvSpPr txBox="1"/>
+          <p:nvPr/>
+        </p:nvSpPr>
+        <p:spPr>
+          <a:xfrm>
+            <a:off x="822960" y="4160520"/>
+            <a:ext cx="10515600" cy="640080"/>
+          </a:xfrm>
+          <a:prstGeom prst="rect">
+            <a:avLst/>
+          </a:prstGeom>
+          <a:noFill/>
+        </p:spPr>
+        <p:txBody>
+          <a:bodyPr wrap="square">
+            <a:spAutoFit/>
+          </a:bodyPr>
+          <a:lstStyle/>
+          <a:p>
+            <a:pPr>
+              <a:defRPr sz="2200" b="0">
+                <a:solidFill>
+                  <a:srgbClr val="595959"/>
+                </a:solidFill>
+                <a:latin typeface="Arial"/>
+              </a:defRPr>
+            </a:pPr>
+            <a:r>
+              <a:t>4. Khống chế độ dài câu trả lời (~4h) — câu ngắn đã khớp paper 0,89</a:t>
+            </a:r>
+          </a:p>
+        </p:txBody>
+      </p:sp>
+    </p:spTree>
+  </p:cSld>
+  <p:clrMapOvr>
+    <a:masterClrMapping/>
+  </p:clrMapOvr>
+</p:sld>
+</file>
+
+<file path=ppt/slides/slide18.xml><?xml version="1.0" encoding="utf-8"?>
+<p:sld xmlns:a="http://schemas.openxmlformats.org/drawingml/2006/main" xmlns:p="http://schemas.openxmlformats.org/presentationml/2006/main" xmlns:r="http://schemas.openxmlformats.org/officeDocument/2006/relationships">
+  <p:cSld>
+    <p:bg>
+      <p:bgPr>
+        <a:solidFill>
+          <a:srgbClr val="1F3864"/>
+        </a:solidFill>
+        <a:effectLst/>
+      </p:bgPr>
+    </p:bg>
+    <p:spTree>
+      <p:nvGrpSpPr>
+        <p:cNvPr id="1" name=""/>
+        <p:cNvGrpSpPr/>
+        <p:nvPr/>
+      </p:nvGrpSpPr>
+      <p:grpSpPr/>
+      <p:sp>
+        <p:nvSpPr>
+          <p:cNvPr id="2" name="TextBox 1"/>
+          <p:cNvSpPr txBox="1"/>
+          <p:nvPr/>
+        </p:nvSpPr>
+        <p:spPr>
+          <a:xfrm>
+            <a:off x="10972800" y="6400800"/>
+            <a:ext cx="914400" cy="365760"/>
+          </a:xfrm>
+          <a:prstGeom prst="rect">
+            <a:avLst/>
+          </a:prstGeom>
+          <a:noFill/>
+        </p:spPr>
+        <p:txBody>
+          <a:bodyPr wrap="square">
+            <a:spAutoFit/>
+          </a:bodyPr>
+          <a:lstStyle/>
+          <a:p>
+            <a:pPr algn="r">
+              <a:defRPr sz="1200" b="0">
+                <a:solidFill>
+                  <a:srgbClr val="595959"/>
+                </a:solidFill>
+                <a:latin typeface="Arial"/>
+              </a:defRPr>
+            </a:pPr>
+            <a:r>
+              <a:t>18/18</a:t>
+            </a:r>
+          </a:p>
+        </p:txBody>
+      </p:sp>
+      <p:sp>
+        <p:nvSpPr>
+          <p:cNvPr id="3" name="TextBox 2"/>
+          <p:cNvSpPr txBox="1"/>
+          <p:nvPr/>
+        </p:nvSpPr>
+        <p:spPr>
+          <a:xfrm>
+            <a:off x="822960" y="1463040"/>
+            <a:ext cx="10515600" cy="2011680"/>
+          </a:xfrm>
+          <a:prstGeom prst="rect">
+            <a:avLst/>
+          </a:prstGeom>
+          <a:noFill/>
+        </p:spPr>
+        <p:txBody>
+          <a:bodyPr wrap="square">
+            <a:spAutoFit/>
+          </a:bodyPr>
+          <a:lstStyle/>
+          <a:p>
+            <a:pPr>
+              <a:defRPr sz="3000" b="1">
+                <a:solidFill>
+                  <a:srgbClr val="FFFFFF"/>
+                </a:solidFill>
+                <a:latin typeface="Arial"/>
+              </a:defRPr>
+            </a:pPr>
+            <a:r>
               <a:t>Đúng cơ chế, đúng thứ hạng, đúng hướng ablation — chênh lệch nào cũng có nguyên nhân đã đo.</a:t>
             </a:r>
           </a:p>
@@ -4258,72 +5813,72 @@
       </p:sp>
       <p:sp>
         <p:nvSpPr>
+          <p:cNvPr id="4" name="TextBox 3"/>
+          <p:cNvSpPr txBox="1"/>
+          <p:nvPr/>
+        </p:nvSpPr>
+        <p:spPr>
+          <a:xfrm>
+            <a:off x="822960" y="3840480"/>
+            <a:ext cx="10515600" cy="640080"/>
+          </a:xfrm>
+          <a:prstGeom prst="rect">
+            <a:avLst/>
+          </a:prstGeom>
+          <a:noFill/>
+        </p:spPr>
+        <p:txBody>
+          <a:bodyPr wrap="square">
+            <a:spAutoFit/>
+          </a:bodyPr>
+          <a:lstStyle/>
+          <a:p>
+            <a:pPr>
+              <a:defRPr sz="2200" b="0">
+                <a:solidFill>
+                  <a:srgbClr val="2EB8C8"/>
+                </a:solidFill>
+                <a:latin typeface="Arial"/>
+              </a:defRPr>
+            </a:pPr>
+            <a:r>
+              <a:t>Tài sản còn lại: KG y khoa 52 nghìn entity + dây chuyền chạy được + 43 quy tắc vận hành</a:t>
+            </a:r>
+          </a:p>
+        </p:txBody>
+      </p:sp>
+      <p:sp>
+        <p:nvSpPr>
           <p:cNvPr id="5" name="TextBox 4"/>
           <p:cNvSpPr txBox="1"/>
           <p:nvPr/>
         </p:nvSpPr>
         <p:spPr>
           <a:xfrm>
-            <a:off x="822960" y="4206240"/>
-            <a:ext cx="10515600" cy="548640"/>
-          </a:xfrm>
-          <a:prstGeom prst="rect">
-            <a:avLst/>
-          </a:prstGeom>
-          <a:noFill/>
-        </p:spPr>
-        <p:txBody>
-          <a:bodyPr wrap="none">
-            <a:spAutoFit/>
-          </a:bodyPr>
-          <a:lstStyle/>
-          <a:p>
-            <a:pPr>
-              <a:defRPr sz="2200">
-                <a:solidFill>
-                  <a:srgbClr val="595959"/>
-                </a:solidFill>
-                <a:latin typeface="Arial"/>
-              </a:defRPr>
-            </a:pPr>
-            <a:r>
-              <a:t>Tài sản còn lại: KG y khoa 52 nghìn entity + dây chuyền chạy được + 43 quy tắc vận hành</a:t>
-            </a:r>
-          </a:p>
-        </p:txBody>
-      </p:sp>
-      <p:sp>
-        <p:nvSpPr>
-          <p:cNvPr id="6" name="TextBox 5"/>
-          <p:cNvSpPr txBox="1"/>
-          <p:nvPr/>
-        </p:nvSpPr>
-        <p:spPr>
-          <a:xfrm>
-            <a:off x="822960" y="4846320"/>
-            <a:ext cx="10515600" cy="548640"/>
-          </a:xfrm>
-          <a:prstGeom prst="rect">
-            <a:avLst/>
-          </a:prstGeom>
-          <a:noFill/>
-        </p:spPr>
-        <p:txBody>
-          <a:bodyPr wrap="none">
-            <a:spAutoFit/>
-          </a:bodyPr>
-          <a:lstStyle/>
-          <a:p>
-            <a:pPr>
-              <a:defRPr sz="2200">
-                <a:solidFill>
-                  <a:srgbClr val="595959"/>
-                </a:solidFill>
-                <a:latin typeface="Arial"/>
-              </a:defRPr>
-            </a:pPr>
-            <a:r>
-              <a:t>Không bịa số (GPU thật, đủ log) • không chọn số đẹp • không số tưởng tượng</a:t>
+            <a:off x="822960" y="4754880"/>
+            <a:ext cx="10515600" cy="640080"/>
+          </a:xfrm>
+          <a:prstGeom prst="rect">
+            <a:avLst/>
+          </a:prstGeom>
+          <a:noFill/>
+        </p:spPr>
+        <p:txBody>
+          <a:bodyPr wrap="square">
+            <a:spAutoFit/>
+          </a:bodyPr>
+          <a:lstStyle/>
+          <a:p>
+            <a:pPr>
+              <a:defRPr sz="2200" b="0">
+                <a:solidFill>
+                  <a:srgbClr val="FFFFFF"/>
+                </a:solidFill>
+                <a:latin typeface="Arial"/>
+              </a:defRPr>
+            </a:pPr>
+            <a:r>
+              <a:t>Không bịa số  •  Không chọn số đẹp  •  Không số tưởng tượng</a:t>
             </a:r>
           </a:p>
         </p:txBody>
@@ -4371,13 +5926,13 @@
           <a:noFill/>
         </p:spPr>
         <p:txBody>
-          <a:bodyPr wrap="none">
+          <a:bodyPr wrap="square">
             <a:spAutoFit/>
           </a:bodyPr>
           <a:lstStyle/>
           <a:p>
             <a:pPr algn="r">
-              <a:defRPr sz="1200">
+              <a:defRPr sz="1200" b="0">
                 <a:solidFill>
                   <a:srgbClr val="595959"/>
                 </a:solidFill>
@@ -4385,7 +5940,7 @@
               </a:defRPr>
             </a:pPr>
             <a:r>
-              <a:t>2/13</a:t>
+              <a:t>2/18</a:t>
             </a:r>
           </a:p>
         </p:txBody>
@@ -4398,22 +5953,58 @@
         </p:nvSpPr>
         <p:spPr>
           <a:xfrm>
-            <a:off x="640080" y="274320"/>
-            <a:ext cx="10881360" cy="914400"/>
-          </a:xfrm>
-          <a:prstGeom prst="rect">
-            <a:avLst/>
-          </a:prstGeom>
-          <a:noFill/>
-        </p:spPr>
-        <p:txBody>
-          <a:bodyPr wrap="none">
-            <a:spAutoFit/>
-          </a:bodyPr>
-          <a:lstStyle/>
-          <a:p>
-            <a:pPr>
-              <a:defRPr sz="3400" b="1">
+            <a:off x="640080" y="320040"/>
+            <a:ext cx="10881360" cy="457200"/>
+          </a:xfrm>
+          <a:prstGeom prst="rect">
+            <a:avLst/>
+          </a:prstGeom>
+          <a:noFill/>
+        </p:spPr>
+        <p:txBody>
+          <a:bodyPr wrap="square">
+            <a:spAutoFit/>
+          </a:bodyPr>
+          <a:lstStyle/>
+          <a:p>
+            <a:pPr>
+              <a:defRPr sz="1400" b="1">
+                <a:solidFill>
+                  <a:srgbClr val="2EB8C8"/>
+                </a:solidFill>
+                <a:latin typeface="Arial"/>
+              </a:defRPr>
+            </a:pPr>
+            <a:r>
+              <a:t>BỐI CẢNH</a:t>
+            </a:r>
+          </a:p>
+        </p:txBody>
+      </p:sp>
+      <p:sp>
+        <p:nvSpPr>
+          <p:cNvPr id="4" name="TextBox 3"/>
+          <p:cNvSpPr txBox="1"/>
+          <p:nvPr/>
+        </p:nvSpPr>
+        <p:spPr>
+          <a:xfrm>
+            <a:off x="640080" y="685800"/>
+            <a:ext cx="10881360" cy="822960"/>
+          </a:xfrm>
+          <a:prstGeom prst="rect">
+            <a:avLst/>
+          </a:prstGeom>
+          <a:noFill/>
+        </p:spPr>
+        <p:txBody>
+          <a:bodyPr wrap="square">
+            <a:spAutoFit/>
+          </a:bodyPr>
+          <a:lstStyle/>
+          <a:p>
+            <a:pPr>
+              <a:defRPr sz="3200" b="1">
                 <a:solidFill>
                   <a:srgbClr val="1F3864"/>
                 </a:solidFill>
@@ -4421,35 +6012,35 @@
               </a:defRPr>
             </a:pPr>
             <a:r>
-              <a:t>ADGR là gì? (3 ý)</a:t>
-            </a:r>
-          </a:p>
-        </p:txBody>
-      </p:sp>
-      <p:sp>
-        <p:nvSpPr>
-          <p:cNvPr id="4" name="TextBox 3"/>
-          <p:cNvSpPr txBox="1"/>
-          <p:nvPr/>
-        </p:nvSpPr>
-        <p:spPr>
-          <a:xfrm>
-            <a:off x="822960" y="1463040"/>
-            <a:ext cx="10515600" cy="548640"/>
-          </a:xfrm>
-          <a:prstGeom prst="rect">
-            <a:avLst/>
-          </a:prstGeom>
-          <a:noFill/>
-        </p:spPr>
-        <p:txBody>
-          <a:bodyPr wrap="none">
-            <a:spAutoFit/>
-          </a:bodyPr>
-          <a:lstStyle/>
-          <a:p>
-            <a:pPr>
-              <a:defRPr sz="2200">
+              <a:t>ADGR là gì? — 3 ý</a:t>
+            </a:r>
+          </a:p>
+        </p:txBody>
+      </p:sp>
+      <p:sp>
+        <p:nvSpPr>
+          <p:cNvPr id="5" name="TextBox 4"/>
+          <p:cNvSpPr txBox="1"/>
+          <p:nvPr/>
+        </p:nvSpPr>
+        <p:spPr>
+          <a:xfrm>
+            <a:off x="822960" y="1828800"/>
+            <a:ext cx="10515600" cy="640080"/>
+          </a:xfrm>
+          <a:prstGeom prst="rect">
+            <a:avLst/>
+          </a:prstGeom>
+          <a:noFill/>
+        </p:spPr>
+        <p:txBody>
+          <a:bodyPr wrap="square">
+            <a:spAutoFit/>
+          </a:bodyPr>
+          <a:lstStyle/>
+          <a:p>
+            <a:pPr>
+              <a:defRPr sz="2200" b="0">
                 <a:solidFill>
                   <a:srgbClr val="595959"/>
                 </a:solidFill>
@@ -4457,35 +6048,35 @@
               </a:defRPr>
             </a:pPr>
             <a:r>
-              <a:t>1. Tìm neo lai: vừa khớp chữ (BM25) vừa gần nghĩa (dense), cả hai cùng thấy thì cộng điểm</a:t>
-            </a:r>
-          </a:p>
-        </p:txBody>
-      </p:sp>
-      <p:sp>
-        <p:nvSpPr>
-          <p:cNvPr id="5" name="TextBox 4"/>
-          <p:cNvSpPr txBox="1"/>
-          <p:nvPr/>
-        </p:nvSpPr>
-        <p:spPr>
-          <a:xfrm>
-            <a:off x="822960" y="2148840"/>
-            <a:ext cx="10515600" cy="548640"/>
-          </a:xfrm>
-          <a:prstGeom prst="rect">
-            <a:avLst/>
-          </a:prstGeom>
-          <a:noFill/>
-        </p:spPr>
-        <p:txBody>
-          <a:bodyPr wrap="none">
-            <a:spAutoFit/>
-          </a:bodyPr>
-          <a:lstStyle/>
-          <a:p>
-            <a:pPr>
-              <a:defRPr sz="2200">
+              <a:t>1. Tìm neo lai: vừa khớp chữ (BM25) vừa gần nghĩa (dense) — cả hai cùng thấy thì cộng điểm</a:t>
+            </a:r>
+          </a:p>
+        </p:txBody>
+      </p:sp>
+      <p:sp>
+        <p:nvSpPr>
+          <p:cNvPr id="6" name="TextBox 5"/>
+          <p:cNvSpPr txBox="1"/>
+          <p:nvPr/>
+        </p:nvSpPr>
+        <p:spPr>
+          <a:xfrm>
+            <a:off x="822960" y="2606040"/>
+            <a:ext cx="10515600" cy="640080"/>
+          </a:xfrm>
+          <a:prstGeom prst="rect">
+            <a:avLst/>
+          </a:prstGeom>
+          <a:noFill/>
+        </p:spPr>
+        <p:txBody>
+          <a:bodyPr wrap="square">
+            <a:spAutoFit/>
+          </a:bodyPr>
+          <a:lstStyle/>
+          <a:p>
+            <a:pPr>
+              <a:defRPr sz="2200" b="0">
                 <a:solidFill>
                   <a:srgbClr val="595959"/>
                 </a:solidFill>
@@ -4500,28 +6091,28 @@
       </p:sp>
       <p:sp>
         <p:nvSpPr>
-          <p:cNvPr id="6" name="TextBox 5"/>
-          <p:cNvSpPr txBox="1"/>
-          <p:nvPr/>
-        </p:nvSpPr>
-        <p:spPr>
-          <a:xfrm>
-            <a:off x="822960" y="2834640"/>
-            <a:ext cx="10515600" cy="548640"/>
-          </a:xfrm>
-          <a:prstGeom prst="rect">
-            <a:avLst/>
-          </a:prstGeom>
-          <a:noFill/>
-        </p:spPr>
-        <p:txBody>
-          <a:bodyPr wrap="none">
-            <a:spAutoFit/>
-          </a:bodyPr>
-          <a:lstStyle/>
-          <a:p>
-            <a:pPr>
-              <a:defRPr sz="2200">
+          <p:cNvPr id="7" name="TextBox 6"/>
+          <p:cNvSpPr txBox="1"/>
+          <p:nvPr/>
+        </p:nvSpPr>
+        <p:spPr>
+          <a:xfrm>
+            <a:off x="822960" y="3383280"/>
+            <a:ext cx="10515600" cy="640080"/>
+          </a:xfrm>
+          <a:prstGeom prst="rect">
+            <a:avLst/>
+          </a:prstGeom>
+          <a:noFill/>
+        </p:spPr>
+        <p:txBody>
+          <a:bodyPr wrap="square">
+            <a:spAutoFit/>
+          </a:bodyPr>
+          <a:lstStyle/>
+          <a:p>
+            <a:pPr>
+              <a:defRPr sz="2200" b="0">
                 <a:solidFill>
                   <a:srgbClr val="595959"/>
                 </a:solidFill>
@@ -4529,35 +6120,35 @@
               </a:defRPr>
             </a:pPr>
             <a:r>
-              <a:t>3. Ngữ cảnh gọn mà trúng: ít token hơn 67% so với baseline mà điểm vẫn cao nhất</a:t>
-            </a:r>
-          </a:p>
-        </p:txBody>
-      </p:sp>
-      <p:sp>
-        <p:nvSpPr>
-          <p:cNvPr id="7" name="TextBox 6"/>
-          <p:cNvSpPr txBox="1"/>
-          <p:nvPr/>
-        </p:nvSpPr>
-        <p:spPr>
-          <a:xfrm>
-            <a:off x="822960" y="3520440"/>
-            <a:ext cx="10515600" cy="548640"/>
-          </a:xfrm>
-          <a:prstGeom prst="rect">
-            <a:avLst/>
-          </a:prstGeom>
-          <a:noFill/>
-        </p:spPr>
-        <p:txBody>
-          <a:bodyPr wrap="none">
-            <a:spAutoFit/>
-          </a:bodyPr>
-          <a:lstStyle/>
-          <a:p>
-            <a:pPr>
-              <a:defRPr sz="2200">
+              <a:t>3. Ngữ cảnh gọn mà trúng: ít token hơn 67% so với baseline mà điểm vẫn cao nhất (RAGAS 0,8792)</a:t>
+            </a:r>
+          </a:p>
+        </p:txBody>
+      </p:sp>
+      <p:sp>
+        <p:nvSpPr>
+          <p:cNvPr id="8" name="TextBox 7"/>
+          <p:cNvSpPr txBox="1"/>
+          <p:nvPr/>
+        </p:nvSpPr>
+        <p:spPr>
+          <a:xfrm>
+            <a:off x="822960" y="4160520"/>
+            <a:ext cx="10515600" cy="640080"/>
+          </a:xfrm>
+          <a:prstGeom prst="rect">
+            <a:avLst/>
+          </a:prstGeom>
+          <a:noFill/>
+        </p:spPr>
+        <p:txBody>
+          <a:bodyPr wrap="square">
+            <a:spAutoFit/>
+          </a:bodyPr>
+          <a:lstStyle/>
+          <a:p>
+            <a:pPr>
+              <a:defRPr sz="2200" b="0">
                 <a:solidFill>
                   <a:srgbClr val="595959"/>
                 </a:solidFill>
@@ -4613,13 +6204,13 @@
           <a:noFill/>
         </p:spPr>
         <p:txBody>
-          <a:bodyPr wrap="none">
+          <a:bodyPr wrap="square">
             <a:spAutoFit/>
           </a:bodyPr>
           <a:lstStyle/>
           <a:p>
             <a:pPr algn="r">
-              <a:defRPr sz="1200">
+              <a:defRPr sz="1200" b="0">
                 <a:solidFill>
                   <a:srgbClr val="595959"/>
                 </a:solidFill>
@@ -4627,7 +6218,7 @@
               </a:defRPr>
             </a:pPr>
             <a:r>
-              <a:t>3/13</a:t>
+              <a:t>3/18</a:t>
             </a:r>
           </a:p>
         </p:txBody>
@@ -4640,22 +6231,58 @@
         </p:nvSpPr>
         <p:spPr>
           <a:xfrm>
-            <a:off x="640080" y="274320"/>
-            <a:ext cx="10881360" cy="914400"/>
-          </a:xfrm>
-          <a:prstGeom prst="rect">
-            <a:avLst/>
-          </a:prstGeom>
-          <a:noFill/>
-        </p:spPr>
-        <p:txBody>
-          <a:bodyPr wrap="none">
-            <a:spAutoFit/>
-          </a:bodyPr>
-          <a:lstStyle/>
-          <a:p>
-            <a:pPr>
-              <a:defRPr sz="3400" b="1">
+            <a:off x="640080" y="320040"/>
+            <a:ext cx="10881360" cy="457200"/>
+          </a:xfrm>
+          <a:prstGeom prst="rect">
+            <a:avLst/>
+          </a:prstGeom>
+          <a:noFill/>
+        </p:spPr>
+        <p:txBody>
+          <a:bodyPr wrap="square">
+            <a:spAutoFit/>
+          </a:bodyPr>
+          <a:lstStyle/>
+          <a:p>
+            <a:pPr>
+              <a:defRPr sz="1400" b="1">
+                <a:solidFill>
+                  <a:srgbClr val="2EB8C8"/>
+                </a:solidFill>
+                <a:latin typeface="Arial"/>
+              </a:defRPr>
+            </a:pPr>
+            <a:r>
+              <a:t>PHẠM VI TÁI HIỆN</a:t>
+            </a:r>
+          </a:p>
+        </p:txBody>
+      </p:sp>
+      <p:sp>
+        <p:nvSpPr>
+          <p:cNvPr id="4" name="TextBox 3"/>
+          <p:cNvSpPr txBox="1"/>
+          <p:nvPr/>
+        </p:nvSpPr>
+        <p:spPr>
+          <a:xfrm>
+            <a:off x="640080" y="685800"/>
+            <a:ext cx="10881360" cy="822960"/>
+          </a:xfrm>
+          <a:prstGeom prst="rect">
+            <a:avLst/>
+          </a:prstGeom>
+          <a:noFill/>
+        </p:spPr>
+        <p:txBody>
+          <a:bodyPr wrap="square">
+            <a:spAutoFit/>
+          </a:bodyPr>
+          <a:lstStyle/>
+          <a:p>
+            <a:pPr>
+              <a:defRPr sz="3200" b="1">
                 <a:solidFill>
                   <a:srgbClr val="1F3864"/>
                 </a:solidFill>
@@ -4670,28 +6297,28 @@
       </p:sp>
       <p:sp>
         <p:nvSpPr>
-          <p:cNvPr id="4" name="TextBox 3"/>
-          <p:cNvSpPr txBox="1"/>
-          <p:nvPr/>
-        </p:nvSpPr>
-        <p:spPr>
-          <a:xfrm>
-            <a:off x="822960" y="1371600"/>
-            <a:ext cx="10515600" cy="548640"/>
-          </a:xfrm>
-          <a:prstGeom prst="rect">
-            <a:avLst/>
-          </a:prstGeom>
-          <a:noFill/>
-        </p:spPr>
-        <p:txBody>
-          <a:bodyPr wrap="none">
-            <a:spAutoFit/>
-          </a:bodyPr>
-          <a:lstStyle/>
-          <a:p>
-            <a:pPr>
-              <a:defRPr sz="2000">
+          <p:cNvPr id="5" name="TextBox 4"/>
+          <p:cNvSpPr txBox="1"/>
+          <p:nvPr/>
+        </p:nvSpPr>
+        <p:spPr>
+          <a:xfrm>
+            <a:off x="822960" y="1737360"/>
+            <a:ext cx="10515600" cy="640080"/>
+          </a:xfrm>
+          <a:prstGeom prst="rect">
+            <a:avLst/>
+          </a:prstGeom>
+          <a:noFill/>
+        </p:spPr>
+        <p:txBody>
+          <a:bodyPr wrap="square">
+            <a:spAutoFit/>
+          </a:bodyPr>
+          <a:lstStyle/>
+          <a:p>
+            <a:pPr>
+              <a:defRPr sz="2000" b="0">
                 <a:solidFill>
                   <a:srgbClr val="595959"/>
                 </a:solidFill>
@@ -4699,35 +6326,35 @@
               </a:defRPr>
             </a:pPr>
             <a:r>
-              <a:t>1. Corpus: tải 1.934 bài báo y khoa (5 link chết, cứu 4, ghi rõ)</a:t>
-            </a:r>
-          </a:p>
-        </p:txBody>
-      </p:sp>
-      <p:sp>
-        <p:nvSpPr>
-          <p:cNvPr id="5" name="TextBox 4"/>
-          <p:cNvSpPr txBox="1"/>
-          <p:nvPr/>
-        </p:nvSpPr>
-        <p:spPr>
-          <a:xfrm>
-            <a:off x="822960" y="1993392"/>
-            <a:ext cx="10515600" cy="548640"/>
-          </a:xfrm>
-          <a:prstGeom prst="rect">
-            <a:avLst/>
-          </a:prstGeom>
-          <a:noFill/>
-        </p:spPr>
-        <p:txBody>
-          <a:bodyPr wrap="none">
-            <a:spAutoFit/>
-          </a:bodyPr>
-          <a:lstStyle/>
-          <a:p>
-            <a:pPr>
-              <a:defRPr sz="2000">
+              <a:t>1. Corpus — tải 1.934 bài báo y khoa (5 link chết, cứu 4, ghi rõ)</a:t>
+            </a:r>
+          </a:p>
+        </p:txBody>
+      </p:sp>
+      <p:sp>
+        <p:nvSpPr>
+          <p:cNvPr id="6" name="TextBox 5"/>
+          <p:cNvSpPr txBox="1"/>
+          <p:nvPr/>
+        </p:nvSpPr>
+        <p:spPr>
+          <a:xfrm>
+            <a:off x="822960" y="2377439"/>
+            <a:ext cx="10515600" cy="640080"/>
+          </a:xfrm>
+          <a:prstGeom prst="rect">
+            <a:avLst/>
+          </a:prstGeom>
+          <a:noFill/>
+        </p:spPr>
+        <p:txBody>
+          <a:bodyPr wrap="square">
+            <a:spAutoFit/>
+          </a:bodyPr>
+          <a:lstStyle/>
+          <a:p>
+            <a:pPr>
+              <a:defRPr sz="2000" b="0">
                 <a:solidFill>
                   <a:srgbClr val="595959"/>
                 </a:solidFill>
@@ -4735,35 +6362,35 @@
               </a:defRPr>
             </a:pPr>
             <a:r>
-              <a:t>2. Chunking: code H2 của tác giả → 15.837 chunk (91,9% paper)</a:t>
-            </a:r>
-          </a:p>
-        </p:txBody>
-      </p:sp>
-      <p:sp>
-        <p:nvSpPr>
-          <p:cNvPr id="6" name="TextBox 5"/>
-          <p:cNvSpPr txBox="1"/>
-          <p:nvPr/>
-        </p:nvSpPr>
-        <p:spPr>
-          <a:xfrm>
-            <a:off x="822960" y="2615184"/>
-            <a:ext cx="10515600" cy="548640"/>
-          </a:xfrm>
-          <a:prstGeom prst="rect">
-            <a:avLst/>
-          </a:prstGeom>
-          <a:noFill/>
-        </p:spPr>
-        <p:txBody>
-          <a:bodyPr wrap="none">
-            <a:spAutoFit/>
-          </a:bodyPr>
-          <a:lstStyle/>
-          <a:p>
-            <a:pPr>
-              <a:defRPr sz="2000">
+              <a:t>2. Chunking — code H2 của tác giả → 15.837 chunk (91,9% paper)</a:t>
+            </a:r>
+          </a:p>
+        </p:txBody>
+      </p:sp>
+      <p:sp>
+        <p:nvSpPr>
+          <p:cNvPr id="7" name="TextBox 6"/>
+          <p:cNvSpPr txBox="1"/>
+          <p:nvPr/>
+        </p:nvSpPr>
+        <p:spPr>
+          <a:xfrm>
+            <a:off x="822960" y="3017520"/>
+            <a:ext cx="10515600" cy="640080"/>
+          </a:xfrm>
+          <a:prstGeom prst="rect">
+            <a:avLst/>
+          </a:prstGeom>
+          <a:noFill/>
+        </p:spPr>
+        <p:txBody>
+          <a:bodyPr wrap="square">
+            <a:spAutoFit/>
+          </a:bodyPr>
+          <a:lstStyle/>
+          <a:p>
+            <a:pPr>
+              <a:defRPr sz="2000" b="0">
                 <a:solidFill>
                   <a:srgbClr val="595959"/>
                 </a:solidFill>
@@ -4771,35 +6398,35 @@
               </a:defRPr>
             </a:pPr>
             <a:r>
-              <a:t>3. Knowledge graph: Qwen2.5-14B rút 52.578 entity / 106.279 relation</a:t>
-            </a:r>
-          </a:p>
-        </p:txBody>
-      </p:sp>
-      <p:sp>
-        <p:nvSpPr>
-          <p:cNvPr id="7" name="TextBox 6"/>
-          <p:cNvSpPr txBox="1"/>
-          <p:nvPr/>
-        </p:nvSpPr>
-        <p:spPr>
-          <a:xfrm>
-            <a:off x="822960" y="3236976"/>
-            <a:ext cx="10515600" cy="548640"/>
-          </a:xfrm>
-          <a:prstGeom prst="rect">
-            <a:avLst/>
-          </a:prstGeom>
-          <a:noFill/>
-        </p:spPr>
-        <p:txBody>
-          <a:bodyPr wrap="none">
-            <a:spAutoFit/>
-          </a:bodyPr>
-          <a:lstStyle/>
-          <a:p>
-            <a:pPr>
-              <a:defRPr sz="2000">
+              <a:t>3. Knowledge graph — Qwen2.5-14B rút 52.578 entity / 106.279 relation</a:t>
+            </a:r>
+          </a:p>
+        </p:txBody>
+      </p:sp>
+      <p:sp>
+        <p:nvSpPr>
+          <p:cNvPr id="8" name="TextBox 7"/>
+          <p:cNvSpPr txBox="1"/>
+          <p:nvPr/>
+        </p:nvSpPr>
+        <p:spPr>
+          <a:xfrm>
+            <a:off x="822960" y="3657599"/>
+            <a:ext cx="10515600" cy="640080"/>
+          </a:xfrm>
+          <a:prstGeom prst="rect">
+            <a:avLst/>
+          </a:prstGeom>
+          <a:noFill/>
+        </p:spPr>
+        <p:txBody>
+          <a:bodyPr wrap="square">
+            <a:spAutoFit/>
+          </a:bodyPr>
+          <a:lstStyle/>
+          <a:p>
+            <a:pPr>
+              <a:defRPr sz="2000" b="0">
                 <a:solidFill>
                   <a:srgbClr val="595959"/>
                 </a:solidFill>
@@ -4807,35 +6434,35 @@
               </a:defRPr>
             </a:pPr>
             <a:r>
-              <a:t>4. Retrieval: 300 câu × 5 phiên bản (bản đủ + 4 bản tắt từng module)</a:t>
-            </a:r>
-          </a:p>
-        </p:txBody>
-      </p:sp>
-      <p:sp>
-        <p:nvSpPr>
-          <p:cNvPr id="8" name="TextBox 7"/>
-          <p:cNvSpPr txBox="1"/>
-          <p:nvPr/>
-        </p:nvSpPr>
-        <p:spPr>
-          <a:xfrm>
-            <a:off x="822960" y="3858768"/>
-            <a:ext cx="10515600" cy="548640"/>
-          </a:xfrm>
-          <a:prstGeom prst="rect">
-            <a:avLst/>
-          </a:prstGeom>
-          <a:noFill/>
-        </p:spPr>
-        <p:txBody>
-          <a:bodyPr wrap="none">
-            <a:spAutoFit/>
-          </a:bodyPr>
-          <a:lstStyle/>
-          <a:p>
-            <a:pPr>
-              <a:defRPr sz="2000">
+              <a:t>4. Retrieval — 300 câu × 5 phiên bản (bản đủ + 4 bản tắt từng module)</a:t>
+            </a:r>
+          </a:p>
+        </p:txBody>
+      </p:sp>
+      <p:sp>
+        <p:nvSpPr>
+          <p:cNvPr id="9" name="TextBox 8"/>
+          <p:cNvSpPr txBox="1"/>
+          <p:nvPr/>
+        </p:nvSpPr>
+        <p:spPr>
+          <a:xfrm>
+            <a:off x="822960" y="4297679"/>
+            <a:ext cx="10515600" cy="640080"/>
+          </a:xfrm>
+          <a:prstGeom prst="rect">
+            <a:avLst/>
+          </a:prstGeom>
+          <a:noFill/>
+        </p:spPr>
+        <p:txBody>
+          <a:bodyPr wrap="square">
+            <a:spAutoFit/>
+          </a:bodyPr>
+          <a:lstStyle/>
+          <a:p>
+            <a:pPr>
+              <a:defRPr sz="2000" b="0">
                 <a:solidFill>
                   <a:srgbClr val="595959"/>
                 </a:solidFill>
@@ -4843,35 +6470,35 @@
               </a:defRPr>
             </a:pPr>
             <a:r>
-              <a:t>5. Sinh câu trả lời: Qwen2.5-14B, temp 0 (cùng input → cùng output)</a:t>
-            </a:r>
-          </a:p>
-        </p:txBody>
-      </p:sp>
-      <p:sp>
-        <p:nvSpPr>
-          <p:cNvPr id="9" name="TextBox 8"/>
-          <p:cNvSpPr txBox="1"/>
-          <p:nvPr/>
-        </p:nvSpPr>
-        <p:spPr>
-          <a:xfrm>
-            <a:off x="822960" y="4480560"/>
-            <a:ext cx="10515600" cy="548640"/>
-          </a:xfrm>
-          <a:prstGeom prst="rect">
-            <a:avLst/>
-          </a:prstGeom>
-          <a:noFill/>
-        </p:spPr>
-        <p:txBody>
-          <a:bodyPr wrap="none">
-            <a:spAutoFit/>
-          </a:bodyPr>
-          <a:lstStyle/>
-          <a:p>
-            <a:pPr>
-              <a:defRPr sz="2000">
+              <a:t>5. Sinh câu trả lời — Qwen2.5-14B, temp 0 (cùng input → cùng output)</a:t>
+            </a:r>
+          </a:p>
+        </p:txBody>
+      </p:sp>
+      <p:sp>
+        <p:nvSpPr>
+          <p:cNvPr id="10" name="TextBox 9"/>
+          <p:cNvSpPr txBox="1"/>
+          <p:nvPr/>
+        </p:nvSpPr>
+        <p:spPr>
+          <a:xfrm>
+            <a:off x="822960" y="4937760"/>
+            <a:ext cx="10515600" cy="640080"/>
+          </a:xfrm>
+          <a:prstGeom prst="rect">
+            <a:avLst/>
+          </a:prstGeom>
+          <a:noFill/>
+        </p:spPr>
+        <p:txBody>
+          <a:bodyPr wrap="square">
+            <a:spAutoFit/>
+          </a:bodyPr>
+          <a:lstStyle/>
+          <a:p>
+            <a:pPr>
+              <a:defRPr sz="2000" b="0">
                 <a:solidFill>
                   <a:srgbClr val="595959"/>
                 </a:solidFill>
@@ -4879,35 +6506,35 @@
               </a:defRPr>
             </a:pPr>
             <a:r>
-              <a:t>6. Chấm điểm: Hit/MRR/nDCG + RAGAS + giám khảo AI 4 chiều × 5 lượt</a:t>
-            </a:r>
-          </a:p>
-        </p:txBody>
-      </p:sp>
-      <p:sp>
-        <p:nvSpPr>
-          <p:cNvPr id="10" name="TextBox 9"/>
-          <p:cNvSpPr txBox="1"/>
-          <p:nvPr/>
-        </p:nvSpPr>
-        <p:spPr>
-          <a:xfrm>
-            <a:off x="822960" y="5102352"/>
-            <a:ext cx="10515600" cy="548640"/>
-          </a:xfrm>
-          <a:prstGeom prst="rect">
-            <a:avLst/>
-          </a:prstGeom>
-          <a:noFill/>
-        </p:spPr>
-        <p:txBody>
-          <a:bodyPr wrap="none">
-            <a:spAutoFit/>
-          </a:bodyPr>
-          <a:lstStyle/>
-          <a:p>
-            <a:pPr>
-              <a:defRPr sz="2000">
+              <a:t>6. Chấm điểm — Hit/MRR/nDCG + RAGAS + giám khảo AI 4 chiều × 5 lượt</a:t>
+            </a:r>
+          </a:p>
+        </p:txBody>
+      </p:sp>
+      <p:sp>
+        <p:nvSpPr>
+          <p:cNvPr id="11" name="TextBox 10"/>
+          <p:cNvSpPr txBox="1"/>
+          <p:nvPr/>
+        </p:nvSpPr>
+        <p:spPr>
+          <a:xfrm>
+            <a:off x="822960" y="5577840"/>
+            <a:ext cx="10515600" cy="640080"/>
+          </a:xfrm>
+          <a:prstGeom prst="rect">
+            <a:avLst/>
+          </a:prstGeom>
+          <a:noFill/>
+        </p:spPr>
+        <p:txBody>
+          <a:bodyPr wrap="square">
+            <a:spAutoFit/>
+          </a:bodyPr>
+          <a:lstStyle/>
+          <a:p>
+            <a:pPr>
+              <a:defRPr sz="2000" b="0">
                 <a:solidFill>
                   <a:srgbClr val="595959"/>
                 </a:solidFill>
@@ -4915,7 +6542,7 @@
               </a:defRPr>
             </a:pPr>
             <a:r>
-              <a:t>7. Tổng hợp: 8 bảng số + 11 hình + báo cáo (mọi số truy được file gốc)</a:t>
+              <a:t>7. Tổng hợp — 8 bảng số + 11 hình + báo cáo (mọi số truy được file gốc)</a:t>
             </a:r>
           </a:p>
         </p:txBody>
@@ -4963,13 +6590,13 @@
           <a:noFill/>
         </p:spPr>
         <p:txBody>
-          <a:bodyPr wrap="none">
+          <a:bodyPr wrap="square">
             <a:spAutoFit/>
           </a:bodyPr>
           <a:lstStyle/>
           <a:p>
             <a:pPr algn="r">
-              <a:defRPr sz="1200">
+              <a:defRPr sz="1200" b="0">
                 <a:solidFill>
                   <a:srgbClr val="595959"/>
                 </a:solidFill>
@@ -4977,7 +6604,7 @@
               </a:defRPr>
             </a:pPr>
             <a:r>
-              <a:t>4/13</a:t>
+              <a:t>4/18</a:t>
             </a:r>
           </a:p>
         </p:txBody>
@@ -4990,22 +6617,58 @@
         </p:nvSpPr>
         <p:spPr>
           <a:xfrm>
-            <a:off x="640080" y="274320"/>
-            <a:ext cx="10881360" cy="914400"/>
-          </a:xfrm>
-          <a:prstGeom prst="rect">
-            <a:avLst/>
-          </a:prstGeom>
-          <a:noFill/>
-        </p:spPr>
-        <p:txBody>
-          <a:bodyPr wrap="none">
-            <a:spAutoFit/>
-          </a:bodyPr>
-          <a:lstStyle/>
-          <a:p>
-            <a:pPr>
-              <a:defRPr sz="3400" b="1">
+            <a:off x="640080" y="320040"/>
+            <a:ext cx="10881360" cy="457200"/>
+          </a:xfrm>
+          <a:prstGeom prst="rect">
+            <a:avLst/>
+          </a:prstGeom>
+          <a:noFill/>
+        </p:spPr>
+        <p:txBody>
+          <a:bodyPr wrap="square">
+            <a:spAutoFit/>
+          </a:bodyPr>
+          <a:lstStyle/>
+          <a:p>
+            <a:pPr>
+              <a:defRPr sz="1400" b="1">
+                <a:solidFill>
+                  <a:srgbClr val="2EB8C8"/>
+                </a:solidFill>
+                <a:latin typeface="Arial"/>
+              </a:defRPr>
+            </a:pPr>
+            <a:r>
+              <a:t>BẢNG 1 — QUY MÔ</a:t>
+            </a:r>
+          </a:p>
+        </p:txBody>
+      </p:sp>
+      <p:sp>
+        <p:nvSpPr>
+          <p:cNvPr id="4" name="TextBox 3"/>
+          <p:cNvSpPr txBox="1"/>
+          <p:nvPr/>
+        </p:nvSpPr>
+        <p:spPr>
+          <a:xfrm>
+            <a:off x="640080" y="685800"/>
+            <a:ext cx="10881360" cy="822960"/>
+          </a:xfrm>
+          <a:prstGeom prst="rect">
+            <a:avLst/>
+          </a:prstGeom>
+          <a:noFill/>
+        </p:spPr>
+        <p:txBody>
+          <a:bodyPr wrap="square">
+            <a:spAutoFit/>
+          </a:bodyPr>
+          <a:lstStyle/>
+          <a:p>
+            <a:pPr>
+              <a:defRPr sz="3000" b="1">
                 <a:solidFill>
                   <a:srgbClr val="1F3864"/>
                 </a:solidFill>
@@ -5020,7 +6683,7 @@
       </p:sp>
       <p:pic>
         <p:nvPicPr>
-          <p:cNvPr id="4" name="Picture 3" descr="fig_tab1_scale.png"/>
+          <p:cNvPr id="5" name="Picture 4" descr="fig_tab1_scale.png"/>
           <p:cNvPicPr>
             <a:picLocks noChangeAspect="1"/>
           </p:cNvPicPr>
@@ -5034,8 +6697,8 @@
         </p:blipFill>
         <p:spPr>
           <a:xfrm>
-            <a:off x="640080" y="1371600"/>
-            <a:ext cx="5669280" cy="2915630"/>
+            <a:off x="640080" y="1737360"/>
+            <a:ext cx="6766560" cy="3479945"/>
           </a:xfrm>
           <a:prstGeom prst="rect">
             <a:avLst/>
@@ -5044,28 +6707,64 @@
       </p:pic>
       <p:sp>
         <p:nvSpPr>
-          <p:cNvPr id="5" name="TextBox 4"/>
-          <p:cNvSpPr txBox="1"/>
-          <p:nvPr/>
-        </p:nvSpPr>
-        <p:spPr>
-          <a:xfrm>
-            <a:off x="822960" y="1828800"/>
-            <a:ext cx="10515600" cy="548640"/>
-          </a:xfrm>
-          <a:prstGeom prst="rect">
-            <a:avLst/>
-          </a:prstGeom>
-          <a:noFill/>
-        </p:spPr>
-        <p:txBody>
-          <a:bodyPr wrap="none">
-            <a:spAutoFit/>
-          </a:bodyPr>
-          <a:lstStyle/>
-          <a:p>
-            <a:pPr>
-              <a:defRPr sz="2200">
+          <p:cNvPr id="6" name="TextBox 5"/>
+          <p:cNvSpPr txBox="1"/>
+          <p:nvPr/>
+        </p:nvSpPr>
+        <p:spPr>
+          <a:xfrm>
+            <a:off x="7772400" y="1828800"/>
+            <a:ext cx="3474720" cy="1188720"/>
+          </a:xfrm>
+          <a:prstGeom prst="rect">
+            <a:avLst/>
+          </a:prstGeom>
+          <a:noFill/>
+        </p:spPr>
+        <p:txBody>
+          <a:bodyPr wrap="square">
+            <a:spAutoFit/>
+          </a:bodyPr>
+          <a:lstStyle/>
+          <a:p>
+            <a:pPr algn="ctr">
+              <a:defRPr sz="5600" b="1">
+                <a:solidFill>
+                  <a:srgbClr val="2EB8C8"/>
+                </a:solidFill>
+                <a:latin typeface="Arial"/>
+              </a:defRPr>
+            </a:pPr>
+            <a:r>
+              <a:t>92–107%</a:t>
+            </a:r>
+          </a:p>
+        </p:txBody>
+      </p:sp>
+      <p:sp>
+        <p:nvSpPr>
+          <p:cNvPr id="7" name="TextBox 6"/>
+          <p:cNvSpPr txBox="1"/>
+          <p:nvPr/>
+        </p:nvSpPr>
+        <p:spPr>
+          <a:xfrm>
+            <a:off x="7863840" y="3291840"/>
+            <a:ext cx="3749039" cy="640080"/>
+          </a:xfrm>
+          <a:prstGeom prst="rect">
+            <a:avLst/>
+          </a:prstGeom>
+          <a:noFill/>
+        </p:spPr>
+        <p:txBody>
+          <a:bodyPr wrap="square">
+            <a:spAutoFit/>
+          </a:bodyPr>
+          <a:lstStyle/>
+          <a:p>
+            <a:pPr>
+              <a:defRPr sz="1900" b="0">
                 <a:solidFill>
                   <a:srgbClr val="595959"/>
                 </a:solidFill>
@@ -5073,35 +6772,35 @@
               </a:defRPr>
             </a:pPr>
             <a:r>
-              <a:t>52.578 entity / 106.279 relation</a:t>
-            </a:r>
-          </a:p>
-        </p:txBody>
-      </p:sp>
-      <p:sp>
-        <p:nvSpPr>
-          <p:cNvPr id="6" name="TextBox 5"/>
-          <p:cNvSpPr txBox="1"/>
-          <p:nvPr/>
-        </p:nvSpPr>
-        <p:spPr>
-          <a:xfrm>
-            <a:off x="822960" y="2331720"/>
-            <a:ext cx="10515600" cy="548640"/>
-          </a:xfrm>
-          <a:prstGeom prst="rect">
-            <a:avLst/>
-          </a:prstGeom>
-          <a:noFill/>
-        </p:spPr>
-        <p:txBody>
-          <a:bodyPr wrap="none">
-            <a:spAutoFit/>
-          </a:bodyPr>
-          <a:lstStyle/>
-          <a:p>
-            <a:pPr>
-              <a:defRPr sz="2200">
+              <a:t>• 52.578 entity / 106.279 relation</a:t>
+            </a:r>
+          </a:p>
+        </p:txBody>
+      </p:sp>
+      <p:sp>
+        <p:nvSpPr>
+          <p:cNvPr id="8" name="TextBox 7"/>
+          <p:cNvSpPr txBox="1"/>
+          <p:nvPr/>
+        </p:nvSpPr>
+        <p:spPr>
+          <a:xfrm>
+            <a:off x="7863840" y="3895344"/>
+            <a:ext cx="3749039" cy="640080"/>
+          </a:xfrm>
+          <a:prstGeom prst="rect">
+            <a:avLst/>
+          </a:prstGeom>
+          <a:noFill/>
+        </p:spPr>
+        <p:txBody>
+          <a:bodyPr wrap="square">
+            <a:spAutoFit/>
+          </a:bodyPr>
+          <a:lstStyle/>
+          <a:p>
+            <a:pPr>
+              <a:defRPr sz="1900" b="0">
                 <a:solidFill>
                   <a:srgbClr val="595959"/>
                 </a:solidFill>
@@ -5116,64 +6815,28 @@
       </p:sp>
       <p:sp>
         <p:nvSpPr>
-          <p:cNvPr id="7" name="TextBox 6"/>
-          <p:cNvSpPr txBox="1"/>
-          <p:nvPr/>
-        </p:nvSpPr>
-        <p:spPr>
-          <a:xfrm>
-            <a:off x="7315200" y="2011680"/>
-            <a:ext cx="3291840" cy="1097280"/>
-          </a:xfrm>
-          <a:prstGeom prst="rect">
-            <a:avLst/>
-          </a:prstGeom>
-          <a:noFill/>
-        </p:spPr>
-        <p:txBody>
-          <a:bodyPr wrap="none">
-            <a:spAutoFit/>
-          </a:bodyPr>
-          <a:lstStyle/>
-          <a:p>
-            <a:pPr algn="ctr">
-              <a:defRPr sz="5400" b="1">
-                <a:solidFill>
-                  <a:srgbClr val="2E75B6"/>
-                </a:solidFill>
-                <a:latin typeface="Arial"/>
-              </a:defRPr>
-            </a:pPr>
-            <a:r>
-              <a:t>92–107%</a:t>
-            </a:r>
-          </a:p>
-        </p:txBody>
-      </p:sp>
-      <p:sp>
-        <p:nvSpPr>
-          <p:cNvPr id="8" name="TextBox 7"/>
-          <p:cNvSpPr txBox="1"/>
-          <p:nvPr/>
-        </p:nvSpPr>
-        <p:spPr>
-          <a:xfrm>
-            <a:off x="822960" y="4206240"/>
-            <a:ext cx="10515600" cy="548640"/>
-          </a:xfrm>
-          <a:prstGeom prst="rect">
-            <a:avLst/>
-          </a:prstGeom>
-          <a:noFill/>
-        </p:spPr>
-        <p:txBody>
-          <a:bodyPr wrap="none">
-            <a:spAutoFit/>
-          </a:bodyPr>
-          <a:lstStyle/>
-          <a:p>
-            <a:pPr>
-              <a:defRPr sz="2000">
+          <p:cNvPr id="9" name="TextBox 8"/>
+          <p:cNvSpPr txBox="1"/>
+          <p:nvPr/>
+        </p:nvSpPr>
+        <p:spPr>
+          <a:xfrm>
+            <a:off x="7863840" y="4498848"/>
+            <a:ext cx="3749039" cy="640080"/>
+          </a:xfrm>
+          <a:prstGeom prst="rect">
+            <a:avLst/>
+          </a:prstGeom>
+          <a:noFill/>
+        </p:spPr>
+        <p:txBody>
+          <a:bodyPr wrap="square">
+            <a:spAutoFit/>
+          </a:bodyPr>
+          <a:lstStyle/>
+          <a:p>
+            <a:pPr>
+              <a:defRPr sz="1900" b="0">
                 <a:solidFill>
                   <a:srgbClr val="595959"/>
                 </a:solidFill>
@@ -5181,43 +6844,7 @@
               </a:defRPr>
             </a:pPr>
             <a:r>
-              <a:t>Chất lượng: DSER 0,913 / SCR 0,884 / LCR 0,816</a:t>
-            </a:r>
-          </a:p>
-        </p:txBody>
-      </p:sp>
-      <p:sp>
-        <p:nvSpPr>
-          <p:cNvPr id="9" name="TextBox 8"/>
-          <p:cNvSpPr txBox="1"/>
-          <p:nvPr/>
-        </p:nvSpPr>
-        <p:spPr>
-          <a:xfrm>
-            <a:off x="822960" y="4709159"/>
-            <a:ext cx="10515600" cy="548640"/>
-          </a:xfrm>
-          <a:prstGeom prst="rect">
-            <a:avLst/>
-          </a:prstGeom>
-          <a:noFill/>
-        </p:spPr>
-        <p:txBody>
-          <a:bodyPr wrap="none">
-            <a:spAutoFit/>
-          </a:bodyPr>
-          <a:lstStyle/>
-          <a:p>
-            <a:pPr>
-              <a:defRPr sz="2000">
-                <a:solidFill>
-                  <a:srgbClr val="595959"/>
-                </a:solidFill>
-                <a:latin typeface="Arial"/>
-              </a:defRPr>
-            </a:pPr>
-            <a:r>
-              <a:t>Hố duy nhất: LCR −9 điểm (chunk to ôm nhiều chủ đề rời)</a:t>
+              <a:t>• 15.837 chunk (91,9%)</a:t>
             </a:r>
           </a:p>
         </p:txBody>
@@ -5265,13 +6892,13 @@
           <a:noFill/>
         </p:spPr>
         <p:txBody>
-          <a:bodyPr wrap="none">
+          <a:bodyPr wrap="square">
             <a:spAutoFit/>
           </a:bodyPr>
           <a:lstStyle/>
           <a:p>
             <a:pPr algn="r">
-              <a:defRPr sz="1200">
+              <a:defRPr sz="1200" b="0">
                 <a:solidFill>
                   <a:srgbClr val="595959"/>
                 </a:solidFill>
@@ -5279,7 +6906,7 @@
               </a:defRPr>
             </a:pPr>
             <a:r>
-              <a:t>5/13</a:t>
+              <a:t>5/18</a:t>
             </a:r>
           </a:p>
         </p:txBody>
@@ -5292,22 +6919,58 @@
         </p:nvSpPr>
         <p:spPr>
           <a:xfrm>
-            <a:off x="640080" y="274320"/>
-            <a:ext cx="10881360" cy="914400"/>
-          </a:xfrm>
-          <a:prstGeom prst="rect">
-            <a:avLst/>
-          </a:prstGeom>
-          <a:noFill/>
-        </p:spPr>
-        <p:txBody>
-          <a:bodyPr wrap="none">
-            <a:spAutoFit/>
-          </a:bodyPr>
-          <a:lstStyle/>
-          <a:p>
-            <a:pPr>
-              <a:defRPr sz="3400" b="1">
+            <a:off x="640080" y="320040"/>
+            <a:ext cx="10881360" cy="457200"/>
+          </a:xfrm>
+          <a:prstGeom prst="rect">
+            <a:avLst/>
+          </a:prstGeom>
+          <a:noFill/>
+        </p:spPr>
+        <p:txBody>
+          <a:bodyPr wrap="square">
+            <a:spAutoFit/>
+          </a:bodyPr>
+          <a:lstStyle/>
+          <a:p>
+            <a:pPr>
+              <a:defRPr sz="1400" b="1">
+                <a:solidFill>
+                  <a:srgbClr val="2EB8C8"/>
+                </a:solidFill>
+                <a:latin typeface="Arial"/>
+              </a:defRPr>
+            </a:pPr>
+            <a:r>
+              <a:t>BẢNG 1 — CHẤT LƯỢNG</a:t>
+            </a:r>
+          </a:p>
+        </p:txBody>
+      </p:sp>
+      <p:sp>
+        <p:nvSpPr>
+          <p:cNvPr id="4" name="TextBox 3"/>
+          <p:cNvSpPr txBox="1"/>
+          <p:nvPr/>
+        </p:nvSpPr>
+        <p:spPr>
+          <a:xfrm>
+            <a:off x="640080" y="685800"/>
+            <a:ext cx="10881360" cy="822960"/>
+          </a:xfrm>
+          <a:prstGeom prst="rect">
+            <a:avLst/>
+          </a:prstGeom>
+          <a:noFill/>
+        </p:spPr>
+        <p:txBody>
+          <a:bodyPr wrap="square">
+            <a:spAutoFit/>
+          </a:bodyPr>
+          <a:lstStyle/>
+          <a:p>
+            <a:pPr>
+              <a:defRPr sz="3000" b="1">
                 <a:solidFill>
                   <a:srgbClr val="1F3864"/>
                 </a:solidFill>
@@ -5315,14 +6978,14 @@
               </a:defRPr>
             </a:pPr>
             <a:r>
-              <a:t>Vì sao chunk to? Bằng chứng đo được</a:t>
+              <a:t>Hố duy nhất nằm ở LCR</a:t>
             </a:r>
           </a:p>
         </p:txBody>
       </p:sp>
       <p:pic>
         <p:nvPicPr>
-          <p:cNvPr id="4" name="Picture 3" descr="fig_rates.png"/>
+          <p:cNvPr id="5" name="Picture 4" descr="fig_tab1_quality.png"/>
           <p:cNvPicPr>
             <a:picLocks noChangeAspect="1"/>
           </p:cNvPicPr>
@@ -5336,8 +6999,8 @@
         </p:blipFill>
         <p:spPr>
           <a:xfrm>
-            <a:off x="640080" y="1371600"/>
-            <a:ext cx="5669280" cy="3023616"/>
+            <a:off x="640080" y="1737360"/>
+            <a:ext cx="6766560" cy="3539431"/>
           </a:xfrm>
           <a:prstGeom prst="rect">
             <a:avLst/>
@@ -5346,28 +7009,64 @@
       </p:pic>
       <p:sp>
         <p:nvSpPr>
-          <p:cNvPr id="5" name="TextBox 4"/>
-          <p:cNvSpPr txBox="1"/>
-          <p:nvPr/>
-        </p:nvSpPr>
-        <p:spPr>
-          <a:xfrm>
-            <a:off x="822960" y="1828800"/>
-            <a:ext cx="10515600" cy="548640"/>
-          </a:xfrm>
-          <a:prstGeom prst="rect">
-            <a:avLst/>
-          </a:prstGeom>
-          <a:noFill/>
-        </p:spPr>
-        <p:txBody>
-          <a:bodyPr wrap="none">
-            <a:spAutoFit/>
-          </a:bodyPr>
-          <a:lstStyle/>
-          <a:p>
-            <a:pPr>
-              <a:defRPr sz="2200">
+          <p:cNvPr id="6" name="TextBox 5"/>
+          <p:cNvSpPr txBox="1"/>
+          <p:nvPr/>
+        </p:nvSpPr>
+        <p:spPr>
+          <a:xfrm>
+            <a:off x="7772400" y="1828800"/>
+            <a:ext cx="3474720" cy="1188720"/>
+          </a:xfrm>
+          <a:prstGeom prst="rect">
+            <a:avLst/>
+          </a:prstGeom>
+          <a:noFill/>
+        </p:spPr>
+        <p:txBody>
+          <a:bodyPr wrap="square">
+            <a:spAutoFit/>
+          </a:bodyPr>
+          <a:lstStyle/>
+          <a:p>
+            <a:pPr algn="ctr">
+              <a:defRPr sz="5600" b="1">
+                <a:solidFill>
+                  <a:srgbClr val="2EB8C8"/>
+                </a:solidFill>
+                <a:latin typeface="Arial"/>
+              </a:defRPr>
+            </a:pPr>
+            <a:r>
+              <a:t>−9pp</a:t>
+            </a:r>
+          </a:p>
+        </p:txBody>
+      </p:sp>
+      <p:sp>
+        <p:nvSpPr>
+          <p:cNvPr id="7" name="TextBox 6"/>
+          <p:cNvSpPr txBox="1"/>
+          <p:nvPr/>
+        </p:nvSpPr>
+        <p:spPr>
+          <a:xfrm>
+            <a:off x="7863840" y="3291840"/>
+            <a:ext cx="3749039" cy="640080"/>
+          </a:xfrm>
+          <a:prstGeom prst="rect">
+            <a:avLst/>
+          </a:prstGeom>
+          <a:noFill/>
+        </p:spPr>
+        <p:txBody>
+          <a:bodyPr wrap="square">
+            <a:spAutoFit/>
+          </a:bodyPr>
+          <a:lstStyle/>
+          <a:p>
+            <a:pPr>
+              <a:defRPr sz="1900" b="0">
                 <a:solidFill>
                   <a:srgbClr val="595959"/>
                 </a:solidFill>
@@ -5375,35 +7074,35 @@
               </a:defRPr>
             </a:pPr>
             <a:r>
-              <a:t>Mật độ trích ~9,4 lượt/chunk, gấp 3 lần paper (~2,9)</a:t>
-            </a:r>
-          </a:p>
-        </p:txBody>
-      </p:sp>
-      <p:sp>
-        <p:nvSpPr>
-          <p:cNvPr id="6" name="TextBox 5"/>
-          <p:cNvSpPr txBox="1"/>
-          <p:nvPr/>
-        </p:nvSpPr>
-        <p:spPr>
-          <a:xfrm>
-            <a:off x="822960" y="2560320"/>
-            <a:ext cx="10515600" cy="548640"/>
-          </a:xfrm>
-          <a:prstGeom prst="rect">
-            <a:avLst/>
-          </a:prstGeom>
-          <a:noFill/>
-        </p:spPr>
-        <p:txBody>
-          <a:bodyPr wrap="none">
-            <a:spAutoFit/>
-          </a:bodyPr>
-          <a:lstStyle/>
-          <a:p>
-            <a:pPr>
-              <a:defRPr sz="2200">
+              <a:t>• DSER 0,913 / SCR 0,884</a:t>
+            </a:r>
+          </a:p>
+        </p:txBody>
+      </p:sp>
+      <p:sp>
+        <p:nvSpPr>
+          <p:cNvPr id="8" name="TextBox 7"/>
+          <p:cNvSpPr txBox="1"/>
+          <p:nvPr/>
+        </p:nvSpPr>
+        <p:spPr>
+          <a:xfrm>
+            <a:off x="7863840" y="3895344"/>
+            <a:ext cx="3749039" cy="640080"/>
+          </a:xfrm>
+          <a:prstGeom prst="rect">
+            <a:avLst/>
+          </a:prstGeom>
+          <a:noFill/>
+        </p:spPr>
+        <p:txBody>
+          <a:bodyPr wrap="square">
+            <a:spAutoFit/>
+          </a:bodyPr>
+          <a:lstStyle/>
+          <a:p>
+            <a:pPr>
+              <a:defRPr sz="1900" b="0">
                 <a:solidFill>
                   <a:srgbClr val="595959"/>
                 </a:solidFill>
@@ -5411,35 +7110,35 @@
               </a:defRPr>
             </a:pPr>
             <a:r>
-              <a:t>Máy trích không tham: chạy trên chunk kiểu tác giả thì khớp paper ngay</a:t>
-            </a:r>
-          </a:p>
-        </p:txBody>
-      </p:sp>
-      <p:sp>
-        <p:nvSpPr>
-          <p:cNvPr id="7" name="TextBox 6"/>
-          <p:cNvSpPr txBox="1"/>
-          <p:nvPr/>
-        </p:nvSpPr>
-        <p:spPr>
-          <a:xfrm>
-            <a:off x="822960" y="3291840"/>
-            <a:ext cx="10515600" cy="548640"/>
-          </a:xfrm>
-          <a:prstGeom prst="rect">
-            <a:avLst/>
-          </a:prstGeom>
-          <a:noFill/>
-        </p:spPr>
-        <p:txBody>
-          <a:bodyPr wrap="none">
-            <a:spAutoFit/>
-          </a:bodyPr>
-          <a:lstStyle/>
-          <a:p>
-            <a:pPr>
-              <a:defRPr sz="2200">
+              <a:t>• LCR 0,816 (paper 0,906)</a:t>
+            </a:r>
+          </a:p>
+        </p:txBody>
+      </p:sp>
+      <p:sp>
+        <p:nvSpPr>
+          <p:cNvPr id="9" name="TextBox 8"/>
+          <p:cNvSpPr txBox="1"/>
+          <p:nvPr/>
+        </p:nvSpPr>
+        <p:spPr>
+          <a:xfrm>
+            <a:off x="7863840" y="4498848"/>
+            <a:ext cx="3749039" cy="640080"/>
+          </a:xfrm>
+          <a:prstGeom prst="rect">
+            <a:avLst/>
+          </a:prstGeom>
+          <a:noFill/>
+        </p:spPr>
+        <p:txBody>
+          <a:bodyPr wrap="square">
+            <a:spAutoFit/>
+          </a:bodyPr>
+          <a:lstStyle/>
+          <a:p>
+            <a:pPr>
+              <a:defRPr sz="1900" b="0">
                 <a:solidFill>
                   <a:srgbClr val="595959"/>
                 </a:solidFill>
@@ -5447,7 +7146,7 @@
               </a:defRPr>
             </a:pPr>
             <a:r>
-              <a:t>Kết luận: khác ở dữ liệu vào (chunk to), không ở thuật toán</a:t>
+              <a:t>• Chunk to ôm nhiều chủ đề rời</a:t>
             </a:r>
           </a:p>
         </p:txBody>
@@ -5495,13 +7194,13 @@
           <a:noFill/>
         </p:spPr>
         <p:txBody>
-          <a:bodyPr wrap="none">
+          <a:bodyPr wrap="square">
             <a:spAutoFit/>
           </a:bodyPr>
           <a:lstStyle/>
           <a:p>
             <a:pPr algn="r">
-              <a:defRPr sz="1200">
+              <a:defRPr sz="1200" b="0">
                 <a:solidFill>
                   <a:srgbClr val="595959"/>
                 </a:solidFill>
@@ -5509,7 +7208,7 @@
               </a:defRPr>
             </a:pPr>
             <a:r>
-              <a:t>6/13</a:t>
+              <a:t>6/18</a:t>
             </a:r>
           </a:p>
         </p:txBody>
@@ -5522,22 +7221,58 @@
         </p:nvSpPr>
         <p:spPr>
           <a:xfrm>
-            <a:off x="640080" y="274320"/>
-            <a:ext cx="10881360" cy="914400"/>
-          </a:xfrm>
-          <a:prstGeom prst="rect">
-            <a:avLst/>
-          </a:prstGeom>
-          <a:noFill/>
-        </p:spPr>
-        <p:txBody>
-          <a:bodyPr wrap="none">
-            <a:spAutoFit/>
-          </a:bodyPr>
-          <a:lstStyle/>
-          <a:p>
-            <a:pPr>
-              <a:defRPr sz="3400" b="1">
+            <a:off x="640080" y="320040"/>
+            <a:ext cx="10881360" cy="457200"/>
+          </a:xfrm>
+          <a:prstGeom prst="rect">
+            <a:avLst/>
+          </a:prstGeom>
+          <a:noFill/>
+        </p:spPr>
+        <p:txBody>
+          <a:bodyPr wrap="square">
+            <a:spAutoFit/>
+          </a:bodyPr>
+          <a:lstStyle/>
+          <a:p>
+            <a:pPr>
+              <a:defRPr sz="1400" b="1">
+                <a:solidFill>
+                  <a:srgbClr val="2EB8C8"/>
+                </a:solidFill>
+                <a:latin typeface="Arial"/>
+              </a:defRPr>
+            </a:pPr>
+            <a:r>
+              <a:t>BẰNG CHỨNG ĐO ĐƯỢC</a:t>
+            </a:r>
+          </a:p>
+        </p:txBody>
+      </p:sp>
+      <p:sp>
+        <p:nvSpPr>
+          <p:cNvPr id="4" name="TextBox 3"/>
+          <p:cNvSpPr txBox="1"/>
+          <p:nvPr/>
+        </p:nvSpPr>
+        <p:spPr>
+          <a:xfrm>
+            <a:off x="640080" y="685800"/>
+            <a:ext cx="10881360" cy="822960"/>
+          </a:xfrm>
+          <a:prstGeom prst="rect">
+            <a:avLst/>
+          </a:prstGeom>
+          <a:noFill/>
+        </p:spPr>
+        <p:txBody>
+          <a:bodyPr wrap="square">
+            <a:spAutoFit/>
+          </a:bodyPr>
+          <a:lstStyle/>
+          <a:p>
+            <a:pPr>
+              <a:defRPr sz="3000" b="1">
                 <a:solidFill>
                   <a:srgbClr val="1F3864"/>
                 </a:solidFill>
@@ -5545,14 +7280,14 @@
               </a:defRPr>
             </a:pPr>
             <a:r>
-              <a:t>Tìm kiếm: bám paper từ top-1 đến top-10</a:t>
+              <a:t>Vì sao chunk to? Máy trích không tham</a:t>
             </a:r>
           </a:p>
         </p:txBody>
       </p:sp>
       <p:pic>
         <p:nvPicPr>
-          <p:cNvPr id="4" name="Picture 3" descr="fig_tab3_hit.png"/>
+          <p:cNvPr id="5" name="Picture 4" descr="fig_rates.png"/>
           <p:cNvPicPr>
             <a:picLocks noChangeAspect="1"/>
           </p:cNvPicPr>
@@ -5566,8 +7301,8 @@
         </p:blipFill>
         <p:spPr>
           <a:xfrm>
-            <a:off x="640080" y="1371600"/>
-            <a:ext cx="5669280" cy="2965470"/>
+            <a:off x="640080" y="1737360"/>
+            <a:ext cx="6766560" cy="3608832"/>
           </a:xfrm>
           <a:prstGeom prst="rect">
             <a:avLst/>
@@ -5576,64 +7311,64 @@
       </p:pic>
       <p:sp>
         <p:nvSpPr>
-          <p:cNvPr id="5" name="TextBox 4"/>
-          <p:cNvSpPr txBox="1"/>
-          <p:nvPr/>
-        </p:nvSpPr>
-        <p:spPr>
-          <a:xfrm>
-            <a:off x="7498079" y="1645920"/>
-            <a:ext cx="3291840" cy="1097280"/>
-          </a:xfrm>
-          <a:prstGeom prst="rect">
-            <a:avLst/>
-          </a:prstGeom>
-          <a:noFill/>
-        </p:spPr>
-        <p:txBody>
-          <a:bodyPr wrap="none">
+          <p:cNvPr id="6" name="TextBox 5"/>
+          <p:cNvSpPr txBox="1"/>
+          <p:nvPr/>
+        </p:nvSpPr>
+        <p:spPr>
+          <a:xfrm>
+            <a:off x="7772400" y="1828800"/>
+            <a:ext cx="3474720" cy="1188720"/>
+          </a:xfrm>
+          <a:prstGeom prst="rect">
+            <a:avLst/>
+          </a:prstGeom>
+          <a:noFill/>
+        </p:spPr>
+        <p:txBody>
+          <a:bodyPr wrap="square">
             <a:spAutoFit/>
           </a:bodyPr>
           <a:lstStyle/>
           <a:p>
             <a:pPr algn="ctr">
-              <a:defRPr sz="5400" b="1">
-                <a:solidFill>
-                  <a:srgbClr val="2E75B6"/>
-                </a:solidFill>
-                <a:latin typeface="Arial"/>
-              </a:defRPr>
-            </a:pPr>
-            <a:r>
-              <a:t>0,79</a:t>
-            </a:r>
-          </a:p>
-        </p:txBody>
-      </p:sp>
-      <p:sp>
-        <p:nvSpPr>
-          <p:cNvPr id="6" name="TextBox 5"/>
-          <p:cNvSpPr txBox="1"/>
-          <p:nvPr/>
-        </p:nvSpPr>
-        <p:spPr>
-          <a:xfrm>
-            <a:off x="822960" y="3291840"/>
-            <a:ext cx="10515600" cy="548640"/>
-          </a:xfrm>
-          <a:prstGeom prst="rect">
-            <a:avLst/>
-          </a:prstGeom>
-          <a:noFill/>
-        </p:spPr>
-        <p:txBody>
-          <a:bodyPr wrap="none">
-            <a:spAutoFit/>
-          </a:bodyPr>
-          <a:lstStyle/>
-          <a:p>
-            <a:pPr>
-              <a:defRPr sz="2000">
+              <a:defRPr sz="5600" b="1">
+                <a:solidFill>
+                  <a:srgbClr val="2EB8C8"/>
+                </a:solidFill>
+                <a:latin typeface="Arial"/>
+              </a:defRPr>
+            </a:pPr>
+            <a:r>
+              <a:t>3×</a:t>
+            </a:r>
+          </a:p>
+        </p:txBody>
+      </p:sp>
+      <p:sp>
+        <p:nvSpPr>
+          <p:cNvPr id="7" name="TextBox 6"/>
+          <p:cNvSpPr txBox="1"/>
+          <p:nvPr/>
+        </p:nvSpPr>
+        <p:spPr>
+          <a:xfrm>
+            <a:off x="7863840" y="3291840"/>
+            <a:ext cx="3749039" cy="640080"/>
+          </a:xfrm>
+          <a:prstGeom prst="rect">
+            <a:avLst/>
+          </a:prstGeom>
+          <a:noFill/>
+        </p:spPr>
+        <p:txBody>
+          <a:bodyPr wrap="square">
+            <a:spAutoFit/>
+          </a:bodyPr>
+          <a:lstStyle/>
+          <a:p>
+            <a:pPr>
+              <a:defRPr sz="1900" b="0">
                 <a:solidFill>
                   <a:srgbClr val="595959"/>
                 </a:solidFill>
@@ -5641,35 +7376,35 @@
               </a:defRPr>
             </a:pPr>
             <a:r>
-              <a:t>Hit@10 bản đủ: 0,79 / 0,68 (paper: 0,71)</a:t>
-            </a:r>
-          </a:p>
-        </p:txBody>
-      </p:sp>
-      <p:sp>
-        <p:nvSpPr>
-          <p:cNvPr id="7" name="TextBox 6"/>
-          <p:cNvSpPr txBox="1"/>
-          <p:nvPr/>
-        </p:nvSpPr>
-        <p:spPr>
-          <a:xfrm>
-            <a:off x="822960" y="3886200"/>
-            <a:ext cx="10515600" cy="548640"/>
-          </a:xfrm>
-          <a:prstGeom prst="rect">
-            <a:avLst/>
-          </a:prstGeom>
-          <a:noFill/>
-        </p:spPr>
-        <p:txBody>
-          <a:bodyPr wrap="none">
-            <a:spAutoFit/>
-          </a:bodyPr>
-          <a:lstStyle/>
-          <a:p>
-            <a:pPr>
-              <a:defRPr sz="2000">
+              <a:t>• Ta ~9,4 lượt/chunk, gấp 3 paper</a:t>
+            </a:r>
+          </a:p>
+        </p:txBody>
+      </p:sp>
+      <p:sp>
+        <p:nvSpPr>
+          <p:cNvPr id="8" name="TextBox 7"/>
+          <p:cNvSpPr txBox="1"/>
+          <p:nvPr/>
+        </p:nvSpPr>
+        <p:spPr>
+          <a:xfrm>
+            <a:off x="7863840" y="3895344"/>
+            <a:ext cx="3749039" cy="640080"/>
+          </a:xfrm>
+          <a:prstGeom prst="rect">
+            <a:avLst/>
+          </a:prstGeom>
+          <a:noFill/>
+        </p:spPr>
+        <p:txBody>
+          <a:bodyPr wrap="square">
+            <a:spAutoFit/>
+          </a:bodyPr>
+          <a:lstStyle/>
+          <a:p>
+            <a:pPr>
+              <a:defRPr sz="1900" b="0">
                 <a:solidFill>
                   <a:srgbClr val="595959"/>
                 </a:solidFill>
@@ -5677,35 +7412,35 @@
               </a:defRPr>
             </a:pPr>
             <a:r>
-              <a:t>Hit@1 yếu thật (0,43 vs 0,60) nhưng hội tụ từ Hit@5</a:t>
-            </a:r>
-          </a:p>
-        </p:txBody>
-      </p:sp>
-      <p:sp>
-        <p:nvSpPr>
-          <p:cNvPr id="8" name="TextBox 7"/>
-          <p:cNvSpPr txBox="1"/>
-          <p:nvPr/>
-        </p:nvSpPr>
-        <p:spPr>
-          <a:xfrm>
-            <a:off x="822960" y="4480560"/>
-            <a:ext cx="10515600" cy="548640"/>
-          </a:xfrm>
-          <a:prstGeom prst="rect">
-            <a:avLst/>
-          </a:prstGeom>
-          <a:noFill/>
-        </p:spPr>
-        <p:txBody>
-          <a:bodyPr wrap="none">
-            <a:spAutoFit/>
-          </a:bodyPr>
-          <a:lstStyle/>
-          <a:p>
-            <a:pPr>
-              <a:defRPr sz="2000">
+              <a:t>• Chạy trên chunk kiểu tác giả</a:t>
+            </a:r>
+          </a:p>
+        </p:txBody>
+      </p:sp>
+      <p:sp>
+        <p:nvSpPr>
+          <p:cNvPr id="9" name="TextBox 8"/>
+          <p:cNvSpPr txBox="1"/>
+          <p:nvPr/>
+        </p:nvSpPr>
+        <p:spPr>
+          <a:xfrm>
+            <a:off x="7863840" y="4498848"/>
+            <a:ext cx="3749039" cy="640080"/>
+          </a:xfrm>
+          <a:prstGeom prst="rect">
+            <a:avLst/>
+          </a:prstGeom>
+          <a:noFill/>
+        </p:spPr>
+        <p:txBody>
+          <a:bodyPr wrap="square">
+            <a:spAutoFit/>
+          </a:bodyPr>
+          <a:lstStyle/>
+          <a:p>
+            <a:pPr>
+              <a:defRPr sz="1900" b="0">
                 <a:solidFill>
                   <a:srgbClr val="595959"/>
                 </a:solidFill>
@@ -5713,7 +7448,7 @@
               </a:defRPr>
             </a:pPr>
             <a:r>
-              <a:t>Thứ tự lạ dense_only &gt; full là hệ quả toán học, đã chứng minh</a:t>
+              <a:t>  thì khớp paper ngay</a:t>
             </a:r>
           </a:p>
         </p:txBody>
@@ -5761,13 +7496,13 @@
           <a:noFill/>
         </p:spPr>
         <p:txBody>
-          <a:bodyPr wrap="none">
+          <a:bodyPr wrap="square">
             <a:spAutoFit/>
           </a:bodyPr>
           <a:lstStyle/>
           <a:p>
             <a:pPr algn="r">
-              <a:defRPr sz="1200">
+              <a:defRPr sz="1200" b="0">
                 <a:solidFill>
                   <a:srgbClr val="595959"/>
                 </a:solidFill>
@@ -5775,7 +7510,7 @@
               </a:defRPr>
             </a:pPr>
             <a:r>
-              <a:t>7/13</a:t>
+              <a:t>7/18</a:t>
             </a:r>
           </a:p>
         </p:txBody>
@@ -5788,22 +7523,58 @@
         </p:nvSpPr>
         <p:spPr>
           <a:xfrm>
-            <a:off x="640080" y="274320"/>
-            <a:ext cx="10881360" cy="914400"/>
-          </a:xfrm>
-          <a:prstGeom prst="rect">
-            <a:avLst/>
-          </a:prstGeom>
-          <a:noFill/>
-        </p:spPr>
-        <p:txBody>
-          <a:bodyPr wrap="none">
-            <a:spAutoFit/>
-          </a:bodyPr>
-          <a:lstStyle/>
-          <a:p>
-            <a:pPr>
-              <a:defRPr sz="3400" b="1">
+            <a:off x="640080" y="320040"/>
+            <a:ext cx="10881360" cy="457200"/>
+          </a:xfrm>
+          <a:prstGeom prst="rect">
+            <a:avLst/>
+          </a:prstGeom>
+          <a:noFill/>
+        </p:spPr>
+        <p:txBody>
+          <a:bodyPr wrap="square">
+            <a:spAutoFit/>
+          </a:bodyPr>
+          <a:lstStyle/>
+          <a:p>
+            <a:pPr>
+              <a:defRPr sz="1400" b="1">
+                <a:solidFill>
+                  <a:srgbClr val="2EB8C8"/>
+                </a:solidFill>
+                <a:latin typeface="Arial"/>
+              </a:defRPr>
+            </a:pPr>
+            <a:r>
+              <a:t>BẢNG 3 — TÌM KIẾM</a:t>
+            </a:r>
+          </a:p>
+        </p:txBody>
+      </p:sp>
+      <p:sp>
+        <p:nvSpPr>
+          <p:cNvPr id="4" name="TextBox 3"/>
+          <p:cNvSpPr txBox="1"/>
+          <p:nvPr/>
+        </p:nvSpPr>
+        <p:spPr>
+          <a:xfrm>
+            <a:off x="640080" y="685800"/>
+            <a:ext cx="10881360" cy="822960"/>
+          </a:xfrm>
+          <a:prstGeom prst="rect">
+            <a:avLst/>
+          </a:prstGeom>
+          <a:noFill/>
+        </p:spPr>
+        <p:txBody>
+          <a:bodyPr wrap="square">
+            <a:spAutoFit/>
+          </a:bodyPr>
+          <a:lstStyle/>
+          <a:p>
+            <a:pPr>
+              <a:defRPr sz="3000" b="1">
                 <a:solidFill>
                   <a:srgbClr val="1F3864"/>
                 </a:solidFill>
@@ -5811,14 +7582,14 @@
               </a:defRPr>
             </a:pPr>
             <a:r>
-              <a:t>Hố sâu nhất: mổ bằng thực nghiệm</a:t>
+              <a:t>Bám paper từ top-1 đến top-10</a:t>
             </a:r>
           </a:p>
         </p:txBody>
       </p:sp>
       <p:pic>
         <p:nvPicPr>
-          <p:cNvPr id="4" name="Picture 3" descr="fig_faith_gap.png"/>
+          <p:cNvPr id="5" name="Picture 4" descr="fig_tab3_hit.png"/>
           <p:cNvPicPr>
             <a:picLocks noChangeAspect="1"/>
           </p:cNvPicPr>
@@ -5832,8 +7603,8 @@
         </p:blipFill>
         <p:spPr>
           <a:xfrm>
-            <a:off x="640080" y="1371600"/>
-            <a:ext cx="5669280" cy="2965470"/>
+            <a:off x="640080" y="1737360"/>
+            <a:ext cx="6766560" cy="3539431"/>
           </a:xfrm>
           <a:prstGeom prst="rect">
             <a:avLst/>
@@ -5842,64 +7613,64 @@
       </p:pic>
       <p:sp>
         <p:nvSpPr>
-          <p:cNvPr id="5" name="TextBox 4"/>
-          <p:cNvSpPr txBox="1"/>
-          <p:nvPr/>
-        </p:nvSpPr>
-        <p:spPr>
-          <a:xfrm>
-            <a:off x="7315200" y="1645920"/>
-            <a:ext cx="3291840" cy="1097280"/>
-          </a:xfrm>
-          <a:prstGeom prst="rect">
-            <a:avLst/>
-          </a:prstGeom>
-          <a:noFill/>
-        </p:spPr>
-        <p:txBody>
-          <a:bodyPr wrap="none">
+          <p:cNvPr id="6" name="TextBox 5"/>
+          <p:cNvSpPr txBox="1"/>
+          <p:nvPr/>
+        </p:nvSpPr>
+        <p:spPr>
+          <a:xfrm>
+            <a:off x="7772400" y="1828800"/>
+            <a:ext cx="3474720" cy="1188720"/>
+          </a:xfrm>
+          <a:prstGeom prst="rect">
+            <a:avLst/>
+          </a:prstGeom>
+          <a:noFill/>
+        </p:spPr>
+        <p:txBody>
+          <a:bodyPr wrap="square">
             <a:spAutoFit/>
           </a:bodyPr>
           <a:lstStyle/>
           <a:p>
             <a:pPr algn="ctr">
-              <a:defRPr sz="5400" b="1">
-                <a:solidFill>
-                  <a:srgbClr val="2E75B6"/>
-                </a:solidFill>
-                <a:latin typeface="Arial"/>
-              </a:defRPr>
-            </a:pPr>
-            <a:r>
-              <a:t>0,41 → 0,77</a:t>
-            </a:r>
-          </a:p>
-        </p:txBody>
-      </p:sp>
-      <p:sp>
-        <p:nvSpPr>
-          <p:cNvPr id="6" name="TextBox 5"/>
-          <p:cNvSpPr txBox="1"/>
-          <p:nvPr/>
-        </p:nvSpPr>
-        <p:spPr>
-          <a:xfrm>
-            <a:off x="822960" y="3291840"/>
-            <a:ext cx="10515600" cy="548640"/>
-          </a:xfrm>
-          <a:prstGeom prst="rect">
-            <a:avLst/>
-          </a:prstGeom>
-          <a:noFill/>
-        </p:spPr>
-        <p:txBody>
-          <a:bodyPr wrap="none">
-            <a:spAutoFit/>
-          </a:bodyPr>
-          <a:lstStyle/>
-          <a:p>
-            <a:pPr>
-              <a:defRPr sz="2000">
+              <a:defRPr sz="5600" b="1">
+                <a:solidFill>
+                  <a:srgbClr val="2EB8C8"/>
+                </a:solidFill>
+                <a:latin typeface="Arial"/>
+              </a:defRPr>
+            </a:pPr>
+            <a:r>
+              <a:t>0,79</a:t>
+            </a:r>
+          </a:p>
+        </p:txBody>
+      </p:sp>
+      <p:sp>
+        <p:nvSpPr>
+          <p:cNvPr id="7" name="TextBox 6"/>
+          <p:cNvSpPr txBox="1"/>
+          <p:nvPr/>
+        </p:nvSpPr>
+        <p:spPr>
+          <a:xfrm>
+            <a:off x="7863840" y="3291840"/>
+            <a:ext cx="3749039" cy="640080"/>
+          </a:xfrm>
+          <a:prstGeom prst="rect">
+            <a:avLst/>
+          </a:prstGeom>
+          <a:noFill/>
+        </p:spPr>
+        <p:txBody>
+          <a:bodyPr wrap="square">
+            <a:spAutoFit/>
+          </a:bodyPr>
+          <a:lstStyle/>
+          <a:p>
+            <a:pPr>
+              <a:defRPr sz="1900" b="0">
                 <a:solidFill>
                   <a:srgbClr val="595959"/>
                 </a:solidFill>
@@ -5907,35 +7678,35 @@
               </a:defRPr>
             </a:pPr>
             <a:r>
-              <a:t>Câu ngắn khớp paper (0,89): máy nguyên vẹn</a:t>
-            </a:r>
-          </a:p>
-        </p:txBody>
-      </p:sp>
-      <p:sp>
-        <p:nvSpPr>
-          <p:cNvPr id="7" name="TextBox 6"/>
-          <p:cNvSpPr txBox="1"/>
-          <p:nvPr/>
-        </p:nvSpPr>
-        <p:spPr>
-          <a:xfrm>
-            <a:off x="822960" y="3886200"/>
-            <a:ext cx="10515600" cy="548640"/>
-          </a:xfrm>
-          <a:prstGeom prst="rect">
-            <a:avLst/>
-          </a:prstGeom>
-          <a:noFill/>
-        </p:spPr>
-        <p:txBody>
-          <a:bodyPr wrap="none">
-            <a:spAutoFit/>
-          </a:bodyPr>
-          <a:lstStyle/>
-          <a:p>
-            <a:pPr>
-              <a:defRPr sz="2000">
+              <a:t>• Hit@10: 0,79 / 0,68 (paper 0,71)</a:t>
+            </a:r>
+          </a:p>
+        </p:txBody>
+      </p:sp>
+      <p:sp>
+        <p:nvSpPr>
+          <p:cNvPr id="8" name="TextBox 7"/>
+          <p:cNvSpPr txBox="1"/>
+          <p:nvPr/>
+        </p:nvSpPr>
+        <p:spPr>
+          <a:xfrm>
+            <a:off x="7863840" y="3895344"/>
+            <a:ext cx="3749039" cy="640080"/>
+          </a:xfrm>
+          <a:prstGeom prst="rect">
+            <a:avLst/>
+          </a:prstGeom>
+          <a:noFill/>
+        </p:spPr>
+        <p:txBody>
+          <a:bodyPr wrap="square">
+            <a:spAutoFit/>
+          </a:bodyPr>
+          <a:lstStyle/>
+          <a:p>
+            <a:pPr>
+              <a:defRPr sz="1900" b="0">
                 <a:solidFill>
                   <a:srgbClr val="595959"/>
                 </a:solidFill>
@@ -5943,35 +7714,35 @@
               </a:defRPr>
             </a:pPr>
             <a:r>
-              <a:t>75% hố do chấm tắt 1 bước; còn lại do giám khảo khó hơn</a:t>
-            </a:r>
-          </a:p>
-        </p:txBody>
-      </p:sp>
-      <p:sp>
-        <p:nvSpPr>
-          <p:cNvPr id="8" name="TextBox 7"/>
-          <p:cNvSpPr txBox="1"/>
-          <p:nvPr/>
-        </p:nvSpPr>
-        <p:spPr>
-          <a:xfrm>
-            <a:off x="822960" y="4480560"/>
-            <a:ext cx="10515600" cy="548640"/>
-          </a:xfrm>
-          <a:prstGeom prst="rect">
-            <a:avLst/>
-          </a:prstGeom>
-          <a:noFill/>
-        </p:spPr>
-        <p:txBody>
-          <a:bodyPr wrap="none">
-            <a:spAutoFit/>
-          </a:bodyPr>
-          <a:lstStyle/>
-          <a:p>
-            <a:pPr>
-              <a:defRPr sz="2000">
+              <a:t>• Hit@1 yếu thật nhưng hội tụ</a:t>
+            </a:r>
+          </a:p>
+        </p:txBody>
+      </p:sp>
+      <p:sp>
+        <p:nvSpPr>
+          <p:cNvPr id="9" name="TextBox 8"/>
+          <p:cNvSpPr txBox="1"/>
+          <p:nvPr/>
+        </p:nvSpPr>
+        <p:spPr>
+          <a:xfrm>
+            <a:off x="7863840" y="4498848"/>
+            <a:ext cx="3749039" cy="640080"/>
+          </a:xfrm>
+          <a:prstGeom prst="rect">
+            <a:avLst/>
+          </a:prstGeom>
+          <a:noFill/>
+        </p:spPr>
+        <p:txBody>
+          <a:bodyPr wrap="square">
+            <a:spAutoFit/>
+          </a:bodyPr>
+          <a:lstStyle/>
+          <a:p>
+            <a:pPr>
+              <a:defRPr sz="1900" b="0">
                 <a:solidFill>
                   <a:srgbClr val="595959"/>
                 </a:solidFill>
@@ -5979,7 +7750,7 @@
               </a:defRPr>
             </a:pPr>
             <a:r>
-              <a:t>Không bóp cách chấm cho số đẹp: đó là gian lận chỉ số</a:t>
+              <a:t>  từ Hit@5</a:t>
             </a:r>
           </a:p>
         </p:txBody>
@@ -6027,13 +7798,13 @@
           <a:noFill/>
         </p:spPr>
         <p:txBody>
-          <a:bodyPr wrap="none">
+          <a:bodyPr wrap="square">
             <a:spAutoFit/>
           </a:bodyPr>
           <a:lstStyle/>
           <a:p>
             <a:pPr algn="r">
-              <a:defRPr sz="1200">
+              <a:defRPr sz="1200" b="0">
                 <a:solidFill>
                   <a:srgbClr val="595959"/>
                 </a:solidFill>
@@ -6041,7 +7812,7 @@
               </a:defRPr>
             </a:pPr>
             <a:r>
-              <a:t>8/13</a:t>
+              <a:t>8/18</a:t>
             </a:r>
           </a:p>
         </p:txBody>
@@ -6054,22 +7825,58 @@
         </p:nvSpPr>
         <p:spPr>
           <a:xfrm>
-            <a:off x="640080" y="274320"/>
-            <a:ext cx="10881360" cy="914400"/>
-          </a:xfrm>
-          <a:prstGeom prst="rect">
-            <a:avLst/>
-          </a:prstGeom>
-          <a:noFill/>
-        </p:spPr>
-        <p:txBody>
-          <a:bodyPr wrap="none">
-            <a:spAutoFit/>
-          </a:bodyPr>
-          <a:lstStyle/>
-          <a:p>
-            <a:pPr>
-              <a:defRPr sz="3400" b="1">
+            <a:off x="640080" y="320040"/>
+            <a:ext cx="10881360" cy="457200"/>
+          </a:xfrm>
+          <a:prstGeom prst="rect">
+            <a:avLst/>
+          </a:prstGeom>
+          <a:noFill/>
+        </p:spPr>
+        <p:txBody>
+          <a:bodyPr wrap="square">
+            <a:spAutoFit/>
+          </a:bodyPr>
+          <a:lstStyle/>
+          <a:p>
+            <a:pPr>
+              <a:defRPr sz="1400" b="1">
+                <a:solidFill>
+                  <a:srgbClr val="2EB8C8"/>
+                </a:solidFill>
+                <a:latin typeface="Arial"/>
+              </a:defRPr>
+            </a:pPr>
+            <a:r>
+              <a:t>BẢNG 4 — RAGAS</a:t>
+            </a:r>
+          </a:p>
+        </p:txBody>
+      </p:sp>
+      <p:sp>
+        <p:nvSpPr>
+          <p:cNvPr id="4" name="TextBox 3"/>
+          <p:cNvSpPr txBox="1"/>
+          <p:nvPr/>
+        </p:nvSpPr>
+        <p:spPr>
+          <a:xfrm>
+            <a:off x="640080" y="685800"/>
+            <a:ext cx="10881360" cy="822960"/>
+          </a:xfrm>
+          <a:prstGeom prst="rect">
+            <a:avLst/>
+          </a:prstGeom>
+          <a:noFill/>
+        </p:spPr>
+        <p:txBody>
+          <a:bodyPr wrap="square">
+            <a:spAutoFit/>
+          </a:bodyPr>
+          <a:lstStyle/>
+          <a:p>
+            <a:pPr>
+              <a:defRPr sz="3000" b="1">
                 <a:solidFill>
                   <a:srgbClr val="1F3864"/>
                 </a:solidFill>
@@ -6077,14 +7884,14 @@
               </a:defRPr>
             </a:pPr>
             <a:r>
-              <a:t>Thứ hạng giữ nguyên cả 2 prompt</a:t>
+              <a:t>Hố nằm đúng 1 ô duy nhất</a:t>
             </a:r>
           </a:p>
         </p:txBody>
       </p:sp>
       <p:pic>
         <p:nvPicPr>
-          <p:cNvPr id="4" name="Picture 3" descr="fig_tab5.png"/>
+          <p:cNvPr id="5" name="Picture 4" descr="fig_tab4_ragas.png"/>
           <p:cNvPicPr>
             <a:picLocks noChangeAspect="1"/>
           </p:cNvPicPr>
@@ -6098,8 +7905,8 @@
         </p:blipFill>
         <p:spPr>
           <a:xfrm>
-            <a:off x="640080" y="1371600"/>
-            <a:ext cx="6217920" cy="2798064"/>
+            <a:off x="640080" y="1737360"/>
+            <a:ext cx="6766560" cy="3479945"/>
           </a:xfrm>
           <a:prstGeom prst="rect">
             <a:avLst/>
@@ -6108,28 +7915,64 @@
       </p:pic>
       <p:sp>
         <p:nvSpPr>
-          <p:cNvPr id="5" name="TextBox 4"/>
-          <p:cNvSpPr txBox="1"/>
-          <p:nvPr/>
-        </p:nvSpPr>
-        <p:spPr>
-          <a:xfrm>
-            <a:off x="822960" y="5120640"/>
-            <a:ext cx="10515600" cy="548640"/>
-          </a:xfrm>
-          <a:prstGeom prst="rect">
-            <a:avLst/>
-          </a:prstGeom>
-          <a:noFill/>
-        </p:spPr>
-        <p:txBody>
-          <a:bodyPr wrap="none">
-            <a:spAutoFit/>
-          </a:bodyPr>
-          <a:lstStyle/>
-          <a:p>
-            <a:pPr>
-              <a:defRPr sz="2000">
+          <p:cNvPr id="6" name="TextBox 5"/>
+          <p:cNvSpPr txBox="1"/>
+          <p:nvPr/>
+        </p:nvSpPr>
+        <p:spPr>
+          <a:xfrm>
+            <a:off x="7772400" y="1828800"/>
+            <a:ext cx="3474720" cy="1188720"/>
+          </a:xfrm>
+          <a:prstGeom prst="rect">
+            <a:avLst/>
+          </a:prstGeom>
+          <a:noFill/>
+        </p:spPr>
+        <p:txBody>
+          <a:bodyPr wrap="square">
+            <a:spAutoFit/>
+          </a:bodyPr>
+          <a:lstStyle/>
+          <a:p>
+            <a:pPr algn="ctr">
+              <a:defRPr sz="5600" b="1">
+                <a:solidFill>
+                  <a:srgbClr val="2EB8C8"/>
+                </a:solidFill>
+                <a:latin typeface="Arial"/>
+              </a:defRPr>
+            </a:pPr>
+            <a:r>
+              <a:t>1 ô</a:t>
+            </a:r>
+          </a:p>
+        </p:txBody>
+      </p:sp>
+      <p:sp>
+        <p:nvSpPr>
+          <p:cNvPr id="7" name="TextBox 6"/>
+          <p:cNvSpPr txBox="1"/>
+          <p:nvPr/>
+        </p:nvSpPr>
+        <p:spPr>
+          <a:xfrm>
+            <a:off x="7863840" y="3291840"/>
+            <a:ext cx="3749039" cy="640080"/>
+          </a:xfrm>
+          <a:prstGeom prst="rect">
+            <a:avLst/>
+          </a:prstGeom>
+          <a:noFill/>
+        </p:spPr>
+        <p:txBody>
+          <a:bodyPr wrap="square">
+            <a:spAutoFit/>
+          </a:bodyPr>
+          <a:lstStyle/>
+          <a:p>
+            <a:pPr>
+              <a:defRPr sz="1900" b="0">
                 <a:solidFill>
                   <a:srgbClr val="595959"/>
                 </a:solidFill>
@@ -6137,35 +7980,35 @@
               </a:defRPr>
             </a:pPr>
             <a:r>
-              <a:t>ADGR 0,858 ≈ Mix 0,858 &gt; Hybrid 0,829 &gt; trả lời chay</a:t>
-            </a:r>
-          </a:p>
-        </p:txBody>
-      </p:sp>
-      <p:sp>
-        <p:nvSpPr>
-          <p:cNvPr id="6" name="TextBox 5"/>
-          <p:cNvSpPr txBox="1"/>
-          <p:nvPr/>
-        </p:nvSpPr>
-        <p:spPr>
-          <a:xfrm>
-            <a:off x="822960" y="5669279"/>
-            <a:ext cx="10515600" cy="548640"/>
-          </a:xfrm>
-          <a:prstGeom prst="rect">
-            <a:avLst/>
-          </a:prstGeom>
-          <a:noFill/>
-        </p:spPr>
-        <p:txBody>
-          <a:bodyPr wrap="none">
-            <a:spAutoFit/>
-          </a:bodyPr>
-          <a:lstStyle/>
-          <a:p>
-            <a:pPr>
-              <a:defRPr sz="2000">
+              <a:t>• Hai cặp bám nhau</a:t>
+            </a:r>
+          </a:p>
+        </p:txBody>
+      </p:sp>
+      <p:sp>
+        <p:nvSpPr>
+          <p:cNvPr id="8" name="TextBox 7"/>
+          <p:cNvSpPr txBox="1"/>
+          <p:nvPr/>
+        </p:nvSpPr>
+        <p:spPr>
+          <a:xfrm>
+            <a:off x="7863840" y="3895344"/>
+            <a:ext cx="3749039" cy="640080"/>
+          </a:xfrm>
+          <a:prstGeom prst="rect">
+            <a:avLst/>
+          </a:prstGeom>
+          <a:noFill/>
+        </p:spPr>
+        <p:txBody>
+          <a:bodyPr wrap="square">
+            <a:spAutoFit/>
+          </a:bodyPr>
+          <a:lstStyle/>
+          <a:p>
+            <a:pPr>
+              <a:defRPr sz="1900" b="0">
                 <a:solidFill>
                   <a:srgbClr val="595959"/>
                 </a:solidFill>
@@ -6173,7 +8016,43 @@
               </a:defRPr>
             </a:pPr>
             <a:r>
-              <a:t>Prompt gốc thấp hơn ~0,08 nhưng 0 đảo hạng trên 10 phương pháp</a:t>
+              <a:t>• Chỉ faithfulness tách</a:t>
+            </a:r>
+          </a:p>
+        </p:txBody>
+      </p:sp>
+      <p:sp>
+        <p:nvSpPr>
+          <p:cNvPr id="9" name="TextBox 8"/>
+          <p:cNvSpPr txBox="1"/>
+          <p:nvPr/>
+        </p:nvSpPr>
+        <p:spPr>
+          <a:xfrm>
+            <a:off x="7863840" y="4498848"/>
+            <a:ext cx="3749039" cy="640080"/>
+          </a:xfrm>
+          <a:prstGeom prst="rect">
+            <a:avLst/>
+          </a:prstGeom>
+          <a:noFill/>
+        </p:spPr>
+        <p:txBody>
+          <a:bodyPr wrap="square">
+            <a:spAutoFit/>
+          </a:bodyPr>
+          <a:lstStyle/>
+          <a:p>
+            <a:pPr>
+              <a:defRPr sz="1900" b="0">
+                <a:solidFill>
+                  <a:srgbClr val="595959"/>
+                </a:solidFill>
+                <a:latin typeface="Arial"/>
+              </a:defRPr>
+            </a:pPr>
+            <a:r>
+              <a:t>• RAGAS-chuẩn: 0,66 / 0,64 / 0,86</a:t>
             </a:r>
           </a:p>
         </p:txBody>
@@ -6221,13 +8100,13 @@
           <a:noFill/>
         </p:spPr>
         <p:txBody>
-          <a:bodyPr wrap="none">
+          <a:bodyPr wrap="square">
             <a:spAutoFit/>
           </a:bodyPr>
           <a:lstStyle/>
           <a:p>
             <a:pPr algn="r">
-              <a:defRPr sz="1200">
+              <a:defRPr sz="1200" b="0">
                 <a:solidFill>
                   <a:srgbClr val="595959"/>
                 </a:solidFill>
@@ -6235,7 +8114,7 @@
               </a:defRPr>
             </a:pPr>
             <a:r>
-              <a:t>9/13</a:t>
+              <a:t>9/18</a:t>
             </a:r>
           </a:p>
         </p:txBody>
@@ -6248,22 +8127,58 @@
         </p:nvSpPr>
         <p:spPr>
           <a:xfrm>
-            <a:off x="640080" y="274320"/>
-            <a:ext cx="10881360" cy="914400"/>
-          </a:xfrm>
-          <a:prstGeom prst="rect">
-            <a:avLst/>
-          </a:prstGeom>
-          <a:noFill/>
-        </p:spPr>
-        <p:txBody>
-          <a:bodyPr wrap="none">
-            <a:spAutoFit/>
-          </a:bodyPr>
-          <a:lstStyle/>
-          <a:p>
-            <a:pPr>
-              <a:defRPr sz="3400" b="1">
+            <a:off x="640080" y="320040"/>
+            <a:ext cx="10881360" cy="457200"/>
+          </a:xfrm>
+          <a:prstGeom prst="rect">
+            <a:avLst/>
+          </a:prstGeom>
+          <a:noFill/>
+        </p:spPr>
+        <p:txBody>
+          <a:bodyPr wrap="square">
+            <a:spAutoFit/>
+          </a:bodyPr>
+          <a:lstStyle/>
+          <a:p>
+            <a:pPr>
+              <a:defRPr sz="1400" b="1">
+                <a:solidFill>
+                  <a:srgbClr val="2EB8C8"/>
+                </a:solidFill>
+                <a:latin typeface="Arial"/>
+              </a:defRPr>
+            </a:pPr>
+            <a:r>
+              <a:t>BẢNG 4 — MỔ HỐ</a:t>
+            </a:r>
+          </a:p>
+        </p:txBody>
+      </p:sp>
+      <p:sp>
+        <p:nvSpPr>
+          <p:cNvPr id="4" name="TextBox 3"/>
+          <p:cNvSpPr txBox="1"/>
+          <p:nvPr/>
+        </p:nvSpPr>
+        <p:spPr>
+          <a:xfrm>
+            <a:off x="640080" y="685800"/>
+            <a:ext cx="10881360" cy="822960"/>
+          </a:xfrm>
+          <a:prstGeom prst="rect">
+            <a:avLst/>
+          </a:prstGeom>
+          <a:noFill/>
+        </p:spPr>
+        <p:txBody>
+          <a:bodyPr wrap="square">
+            <a:spAutoFit/>
+          </a:bodyPr>
+          <a:lstStyle/>
+          <a:p>
+            <a:pPr>
+              <a:defRPr sz="3000" b="1">
                 <a:solidFill>
                   <a:srgbClr val="1F3864"/>
                 </a:solidFill>
@@ -6271,14 +8186,14 @@
               </a:defRPr>
             </a:pPr>
             <a:r>
-              <a:t>Case Aescin: gọn mà trúng</a:t>
+              <a:t>Ba lớp nguyên nhân, đều đã đo</a:t>
             </a:r>
           </a:p>
         </p:txBody>
       </p:sp>
       <p:pic>
         <p:nvPicPr>
-          <p:cNvPr id="4" name="Picture 3" descr="fig_tab8_case.png"/>
+          <p:cNvPr id="5" name="Picture 4" descr="fig_faith_gap.png"/>
           <p:cNvPicPr>
             <a:picLocks noChangeAspect="1"/>
           </p:cNvPicPr>
@@ -6292,8 +8207,8 @@
         </p:blipFill>
         <p:spPr>
           <a:xfrm>
-            <a:off x="640080" y="1371600"/>
-            <a:ext cx="5669280" cy="2915630"/>
+            <a:off x="640080" y="1737360"/>
+            <a:ext cx="6766560" cy="3539431"/>
           </a:xfrm>
           <a:prstGeom prst="rect">
             <a:avLst/>
@@ -6302,28 +8217,64 @@
       </p:pic>
       <p:sp>
         <p:nvSpPr>
-          <p:cNvPr id="5" name="TextBox 4"/>
-          <p:cNvSpPr txBox="1"/>
-          <p:nvPr/>
-        </p:nvSpPr>
-        <p:spPr>
-          <a:xfrm>
-            <a:off x="822960" y="2011680"/>
-            <a:ext cx="10515600" cy="548640"/>
-          </a:xfrm>
-          <a:prstGeom prst="rect">
-            <a:avLst/>
-          </a:prstGeom>
-          <a:noFill/>
-        </p:spPr>
-        <p:txBody>
-          <a:bodyPr wrap="none">
-            <a:spAutoFit/>
-          </a:bodyPr>
-          <a:lstStyle/>
-          <a:p>
-            <a:pPr>
-              <a:defRPr sz="2200">
+          <p:cNvPr id="6" name="TextBox 5"/>
+          <p:cNvSpPr txBox="1"/>
+          <p:nvPr/>
+        </p:nvSpPr>
+        <p:spPr>
+          <a:xfrm>
+            <a:off x="7772400" y="1828800"/>
+            <a:ext cx="3474720" cy="1188720"/>
+          </a:xfrm>
+          <a:prstGeom prst="rect">
+            <a:avLst/>
+          </a:prstGeom>
+          <a:noFill/>
+        </p:spPr>
+        <p:txBody>
+          <a:bodyPr wrap="square">
+            <a:spAutoFit/>
+          </a:bodyPr>
+          <a:lstStyle/>
+          <a:p>
+            <a:pPr algn="ctr">
+              <a:defRPr sz="5600" b="1">
+                <a:solidFill>
+                  <a:srgbClr val="2EB8C8"/>
+                </a:solidFill>
+                <a:latin typeface="Arial"/>
+              </a:defRPr>
+            </a:pPr>
+            <a:r>
+              <a:t>0,41→0,77</a:t>
+            </a:r>
+          </a:p>
+        </p:txBody>
+      </p:sp>
+      <p:sp>
+        <p:nvSpPr>
+          <p:cNvPr id="7" name="TextBox 6"/>
+          <p:cNvSpPr txBox="1"/>
+          <p:nvPr/>
+        </p:nvSpPr>
+        <p:spPr>
+          <a:xfrm>
+            <a:off x="7863840" y="3291840"/>
+            <a:ext cx="3749039" cy="640080"/>
+          </a:xfrm>
+          <a:prstGeom prst="rect">
+            <a:avLst/>
+          </a:prstGeom>
+          <a:noFill/>
+        </p:spPr>
+        <p:txBody>
+          <a:bodyPr wrap="square">
+            <a:spAutoFit/>
+          </a:bodyPr>
+          <a:lstStyle/>
+          <a:p>
+            <a:pPr>
+              <a:defRPr sz="1900" b="0">
                 <a:solidFill>
                   <a:srgbClr val="595959"/>
                 </a:solidFill>
@@ -6331,35 +8282,35 @@
               </a:defRPr>
             </a:pPr>
             <a:r>
-              <a:t>Hybrid lôi 139 relation, lẫn cả chống chỉ định của thuốc khác</a:t>
-            </a:r>
-          </a:p>
-        </p:txBody>
-      </p:sp>
-      <p:sp>
-        <p:nvSpPr>
-          <p:cNvPr id="6" name="TextBox 5"/>
-          <p:cNvSpPr txBox="1"/>
-          <p:nvPr/>
-        </p:nvSpPr>
-        <p:spPr>
-          <a:xfrm>
-            <a:off x="822960" y="2697480"/>
-            <a:ext cx="10515600" cy="548640"/>
-          </a:xfrm>
-          <a:prstGeom prst="rect">
-            <a:avLst/>
-          </a:prstGeom>
-          <a:noFill/>
-        </p:spPr>
-        <p:txBody>
-          <a:bodyPr wrap="none">
-            <a:spAutoFit/>
-          </a:bodyPr>
-          <a:lstStyle/>
-          <a:p>
-            <a:pPr>
-              <a:defRPr sz="2200">
+              <a:t>• Câu ngắn khớp paper (máy tốt)</a:t>
+            </a:r>
+          </a:p>
+        </p:txBody>
+      </p:sp>
+      <p:sp>
+        <p:nvSpPr>
+          <p:cNvPr id="8" name="TextBox 7"/>
+          <p:cNvSpPr txBox="1"/>
+          <p:nvPr/>
+        </p:nvSpPr>
+        <p:spPr>
+          <a:xfrm>
+            <a:off x="7863840" y="3895344"/>
+            <a:ext cx="3749039" cy="640080"/>
+          </a:xfrm>
+          <a:prstGeom prst="rect">
+            <a:avLst/>
+          </a:prstGeom>
+          <a:noFill/>
+        </p:spPr>
+        <p:txBody>
+          <a:bodyPr wrap="square">
+            <a:spAutoFit/>
+          </a:bodyPr>
+          <a:lstStyle/>
+          <a:p>
+            <a:pPr>
+              <a:defRPr sz="1900" b="0">
                 <a:solidFill>
                   <a:srgbClr val="595959"/>
                 </a:solidFill>
@@ -6367,35 +8318,35 @@
               </a:defRPr>
             </a:pPr>
             <a:r>
-              <a:t>(đúng khái niệm, sai thuốc — dễ gây hại)</a:t>
-            </a:r>
-          </a:p>
-        </p:txBody>
-      </p:sp>
-      <p:sp>
-        <p:nvSpPr>
-          <p:cNvPr id="7" name="TextBox 6"/>
-          <p:cNvSpPr txBox="1"/>
-          <p:nvPr/>
-        </p:nvSpPr>
-        <p:spPr>
-          <a:xfrm>
-            <a:off x="822960" y="3383280"/>
-            <a:ext cx="10515600" cy="548640"/>
-          </a:xfrm>
-          <a:prstGeom prst="rect">
-            <a:avLst/>
-          </a:prstGeom>
-          <a:noFill/>
-        </p:spPr>
-        <p:txBody>
-          <a:bodyPr wrap="none">
-            <a:spAutoFit/>
-          </a:bodyPr>
-          <a:lstStyle/>
-          <a:p>
-            <a:pPr>
-              <a:defRPr sz="2200">
+              <a:t>• 75% hố do chấm tắt 1 bước</a:t>
+            </a:r>
+          </a:p>
+        </p:txBody>
+      </p:sp>
+      <p:sp>
+        <p:nvSpPr>
+          <p:cNvPr id="9" name="TextBox 8"/>
+          <p:cNvSpPr txBox="1"/>
+          <p:nvPr/>
+        </p:nvSpPr>
+        <p:spPr>
+          <a:xfrm>
+            <a:off x="7863840" y="4498848"/>
+            <a:ext cx="3749039" cy="640080"/>
+          </a:xfrm>
+          <a:prstGeom prst="rect">
+            <a:avLst/>
+          </a:prstGeom>
+          <a:noFill/>
+        </p:spPr>
+        <p:txBody>
+          <a:bodyPr wrap="square">
+            <a:spAutoFit/>
+          </a:bodyPr>
+          <a:lstStyle/>
+          <a:p>
+            <a:pPr>
+              <a:defRPr sz="1900" b="0">
                 <a:solidFill>
                   <a:srgbClr val="595959"/>
                 </a:solidFill>
@@ -6403,7 +8354,7 @@
               </a:defRPr>
             </a:pPr>
             <a:r>
-              <a:t>ADGR chỉ giữ 3 relation cần; ta: 12–14 entity / 39–41 relation</a:t>
+              <a:t>• Còn lại: giám khảo khó hơn</a:t>
             </a:r>
           </a:p>
         </p:txBody>
